--- a/presentation.pptx
+++ b/presentation.pptx
@@ -165,754 +165,754 @@
                 <c:formatCode>General</c:formatCode>
                 <c:ptCount val="250"/>
                 <c:pt idx="0">
-                  <c:v>0.0933</c:v>
+                  <c:v>0.7204</c:v>
                 </c:pt>
                 <c:pt idx="1">
-                  <c:v>0.6246</c:v>
+                  <c:v>0.8974</c:v>
                 </c:pt>
                 <c:pt idx="2">
-                  <c:v>0.2509</c:v>
+                  <c:v>0.8286</c:v>
                 </c:pt>
                 <c:pt idx="3">
-                  <c:v>0.5068</c:v>
+                  <c:v>0.9559</c:v>
                 </c:pt>
                 <c:pt idx="4">
-                  <c:v>0.109</c:v>
+                  <c:v>0.6977</c:v>
                 </c:pt>
                 <c:pt idx="5">
-                  <c:v>0.9609</c:v>
+                  <c:v>0.9422</c:v>
                 </c:pt>
                 <c:pt idx="6">
-                  <c:v>0.762</c:v>
+                  <c:v>0.9147</c:v>
                 </c:pt>
                 <c:pt idx="7">
-                  <c:v>0.1916</c:v>
+                  <c:v>0.7046</c:v>
                 </c:pt>
                 <c:pt idx="8">
-                  <c:v>0.6803</c:v>
+                  <c:v>0.893</c:v>
                 </c:pt>
                 <c:pt idx="9">
-                  <c:v>0.7888</c:v>
+                  <c:v>0.9264</c:v>
                 </c:pt>
                 <c:pt idx="10">
-                  <c:v>0.7095</c:v>
+                  <c:v>0.895</c:v>
                 </c:pt>
                 <c:pt idx="11">
-                  <c:v>0.8608</c:v>
+                  <c:v>0.9362</c:v>
                 </c:pt>
                 <c:pt idx="12">
-                  <c:v>0.4799</c:v>
+                  <c:v>0.8974</c:v>
                 </c:pt>
                 <c:pt idx="13">
-                  <c:v>0.3625</c:v>
+                  <c:v>0.9245</c:v>
                 </c:pt>
                 <c:pt idx="14">
-                  <c:v>0.1189</c:v>
+                  <c:v>0.6714</c:v>
                 </c:pt>
                 <c:pt idx="15">
-                  <c:v>0.1606</c:v>
+                  <c:v>0.9656</c:v>
                 </c:pt>
                 <c:pt idx="16">
-                  <c:v>0.0733</c:v>
+                  <c:v>0.3431</c:v>
                 </c:pt>
                 <c:pt idx="17">
-                  <c:v>0.2815</c:v>
+                  <c:v>0.8442</c:v>
                 </c:pt>
                 <c:pt idx="18">
-                  <c:v>0.234</c:v>
+                  <c:v>0.8134</c:v>
                 </c:pt>
                 <c:pt idx="19">
-                  <c:v>0.1526</c:v>
+                  <c:v>0.8021</c:v>
                 </c:pt>
                 <c:pt idx="20">
-                  <c:v>0.4949</c:v>
+                  <c:v>0.8718</c:v>
                 </c:pt>
                 <c:pt idx="21">
-                  <c:v>0.0953</c:v>
+                  <c:v>0.6746</c:v>
                 </c:pt>
                 <c:pt idx="22">
-                  <c:v>0.0968</c:v>
+                  <c:v>0.4569</c:v>
                 </c:pt>
                 <c:pt idx="23">
-                  <c:v>0.4475</c:v>
+                  <c:v>0.8175</c:v>
                 </c:pt>
                 <c:pt idx="24">
-                  <c:v>0.7449</c:v>
+                  <c:v>0.9257</c:v>
                 </c:pt>
                 <c:pt idx="25">
-                  <c:v>0.2328</c:v>
+                  <c:v>0.8831</c:v>
                 </c:pt>
                 <c:pt idx="26">
-                  <c:v>0.4064</c:v>
+                  <c:v>0.7715</c:v>
                 </c:pt>
                 <c:pt idx="27">
-                  <c:v>0.1689</c:v>
+                  <c:v>0.8622</c:v>
                 </c:pt>
                 <c:pt idx="28">
-                  <c:v>0.8018</c:v>
+                  <c:v>0.9176</c:v>
                 </c:pt>
                 <c:pt idx="29">
-                  <c:v>0.2248</c:v>
+                  <c:v>0.7919</c:v>
                 </c:pt>
                 <c:pt idx="30">
-                  <c:v>0.0991</c:v>
+                  <c:v>0.6755</c:v>
                 </c:pt>
                 <c:pt idx="31">
-                  <c:v>0.1183</c:v>
+                  <c:v>0.806</c:v>
                 </c:pt>
                 <c:pt idx="32">
-                  <c:v>0.1159</c:v>
+                  <c:v>0.6347</c:v>
                 </c:pt>
                 <c:pt idx="33">
-                  <c:v>0.5549</c:v>
+                  <c:v>0.9674</c:v>
                 </c:pt>
                 <c:pt idx="34">
-                  <c:v>0.1912</c:v>
+                  <c:v>0.8625</c:v>
                 </c:pt>
                 <c:pt idx="35">
-                  <c:v>0.1475</c:v>
+                  <c:v>0.8765</c:v>
                 </c:pt>
                 <c:pt idx="36">
-                  <c:v>0.5143</c:v>
+                  <c:v>0.8849</c:v>
                 </c:pt>
                 <c:pt idx="37">
-                  <c:v>0.1557</c:v>
+                  <c:v>0.6182</c:v>
                 </c:pt>
                 <c:pt idx="38">
-                  <c:v>0.1058</c:v>
+                  <c:v>0.7131</c:v>
                 </c:pt>
                 <c:pt idx="39">
-                  <c:v>0.5929</c:v>
+                  <c:v>0.8799</c:v>
                 </c:pt>
                 <c:pt idx="40">
-                  <c:v>0.3089</c:v>
+                  <c:v>0.8991</c:v>
                 </c:pt>
                 <c:pt idx="41">
-                  <c:v>0.5854</c:v>
+                  <c:v>0.8719</c:v>
                 </c:pt>
                 <c:pt idx="42">
-                  <c:v>0.563</c:v>
+                  <c:v>0.8677</c:v>
                 </c:pt>
                 <c:pt idx="43">
-                  <c:v>0.5256</c:v>
+                  <c:v>0.8935</c:v>
                 </c:pt>
                 <c:pt idx="44">
-                  <c:v>0.2085</c:v>
+                  <c:v>0.7763</c:v>
                 </c:pt>
                 <c:pt idx="45">
-                  <c:v>0.4629</c:v>
+                  <c:v>0.8476</c:v>
                 </c:pt>
                 <c:pt idx="46">
-                  <c:v>0.354</c:v>
+                  <c:v>0.874</c:v>
                 </c:pt>
                 <c:pt idx="47">
-                  <c:v>0.4335</c:v>
+                  <c:v>0.8507</c:v>
                 </c:pt>
                 <c:pt idx="48">
-                  <c:v>0.2319</c:v>
+                  <c:v>0.8644</c:v>
                 </c:pt>
                 <c:pt idx="49">
-                  <c:v>0.8375</c:v>
+                  <c:v>0.9035</c:v>
                 </c:pt>
                 <c:pt idx="50">
-                  <c:v>0.1303</c:v>
+                  <c:v>0.581</c:v>
                 </c:pt>
                 <c:pt idx="51">
-                  <c:v>0.5998</c:v>
+                  <c:v>0.9234</c:v>
                 </c:pt>
                 <c:pt idx="52">
+                  <c:v>0.8857</c:v>
+                </c:pt>
+                <c:pt idx="53">
+                  <c:v>0.8779</c:v>
+                </c:pt>
+                <c:pt idx="54">
+                  <c:v>0.8868</c:v>
+                </c:pt>
+                <c:pt idx="55">
+                  <c:v>0.6049</c:v>
+                </c:pt>
+                <c:pt idx="56">
+                  <c:v>0.9081</c:v>
+                </c:pt>
+                <c:pt idx="57">
+                  <c:v>0.8928</c:v>
+                </c:pt>
+                <c:pt idx="58">
+                  <c:v>0.8949</c:v>
+                </c:pt>
+                <c:pt idx="59">
                   <c:v>0.8784</c:v>
                 </c:pt>
-                <c:pt idx="53">
-                  <c:v>0.4983</c:v>
-                </c:pt>
-                <c:pt idx="54">
-                  <c:v>0.4227</c:v>
-                </c:pt>
-                <c:pt idx="55">
-                  <c:v>0.0589</c:v>
-                </c:pt>
-                <c:pt idx="56">
-                  <c:v>0.5551</c:v>
-                </c:pt>
-                <c:pt idx="57">
-                  <c:v>0.6574</c:v>
-                </c:pt>
-                <c:pt idx="58">
-                  <c:v>0.7247</c:v>
-                </c:pt>
-                <c:pt idx="59">
-                  <c:v>0.6683</c:v>
-                </c:pt>
                 <c:pt idx="60">
-                  <c:v>0.3393</c:v>
+                  <c:v>0.8322</c:v>
                 </c:pt>
                 <c:pt idx="61">
-                  <c:v>0.276</c:v>
+                  <c:v>0.8606</c:v>
                 </c:pt>
                 <c:pt idx="62">
-                  <c:v>0.1171</c:v>
+                  <c:v>0.7881</c:v>
                 </c:pt>
                 <c:pt idx="63">
-                  <c:v>0.2803</c:v>
+                  <c:v>0.7946</c:v>
                 </c:pt>
                 <c:pt idx="64">
-                  <c:v>0.2546</c:v>
+                  <c:v>0.7371</c:v>
                 </c:pt>
                 <c:pt idx="65">
-                  <c:v>0.7971</c:v>
+                  <c:v>0.8981</c:v>
                 </c:pt>
                 <c:pt idx="66">
-                  <c:v>0.0473</c:v>
+                  <c:v>0.3947</c:v>
                 </c:pt>
                 <c:pt idx="67">
-                  <c:v>0.2748</c:v>
+                  <c:v>0.8077</c:v>
                 </c:pt>
                 <c:pt idx="68">
-                  <c:v>0.1312</c:v>
+                  <c:v>0.7115</c:v>
                 </c:pt>
                 <c:pt idx="69">
-                  <c:v>0.1476</c:v>
+                  <c:v>0.8714</c:v>
                 </c:pt>
                 <c:pt idx="70">
-                  <c:v>0.5086</c:v>
+                  <c:v>0.8981</c:v>
                 </c:pt>
                 <c:pt idx="71">
-                  <c:v>0.444</c:v>
+                  <c:v>0.8609</c:v>
                 </c:pt>
                 <c:pt idx="72">
-                  <c:v>0.5642</c:v>
+                  <c:v>0.7736</c:v>
                 </c:pt>
                 <c:pt idx="73">
+                  <c:v>0.901</c:v>
+                </c:pt>
+                <c:pt idx="74">
+                  <c:v>0.8213</c:v>
+                </c:pt>
+                <c:pt idx="75">
+                  <c:v>0.9141</c:v>
+                </c:pt>
+                <c:pt idx="76">
+                  <c:v>0.8698</c:v>
+                </c:pt>
+                <c:pt idx="77">
+                  <c:v>0.8377</c:v>
+                </c:pt>
+                <c:pt idx="78">
+                  <c:v>0.9127</c:v>
+                </c:pt>
+                <c:pt idx="79">
+                  <c:v>0.9138</c:v>
+                </c:pt>
+                <c:pt idx="80">
+                  <c:v>0.7121</c:v>
+                </c:pt>
+                <c:pt idx="81">
+                  <c:v>0.779</c:v>
+                </c:pt>
+                <c:pt idx="82">
+                  <c:v>0.8849</c:v>
+                </c:pt>
+                <c:pt idx="83">
+                  <c:v>0.8861</c:v>
+                </c:pt>
+                <c:pt idx="84">
+                  <c:v>0.9004</c:v>
+                </c:pt>
+                <c:pt idx="85">
+                  <c:v>0.9093</c:v>
+                </c:pt>
+                <c:pt idx="86">
+                  <c:v>0.8918</c:v>
+                </c:pt>
+                <c:pt idx="87">
+                  <c:v>0.9513</c:v>
+                </c:pt>
+                <c:pt idx="88">
+                  <c:v>0.9037</c:v>
+                </c:pt>
+                <c:pt idx="89">
+                  <c:v>0.8603</c:v>
+                </c:pt>
+                <c:pt idx="90">
+                  <c:v>0.8075</c:v>
+                </c:pt>
+                <c:pt idx="91">
+                  <c:v>0.7443</c:v>
+                </c:pt>
+                <c:pt idx="92">
+                  <c:v>0.827</c:v>
+                </c:pt>
+                <c:pt idx="93">
+                  <c:v>0.678</c:v>
+                </c:pt>
+                <c:pt idx="94">
+                  <c:v>0.8465</c:v>
+                </c:pt>
+                <c:pt idx="95">
+                  <c:v>0.9224</c:v>
+                </c:pt>
+                <c:pt idx="96">
+                  <c:v>0.8233</c:v>
+                </c:pt>
+                <c:pt idx="97">
+                  <c:v>0.8701</c:v>
+                </c:pt>
+                <c:pt idx="98">
+                  <c:v>0.7667</c:v>
+                </c:pt>
+                <c:pt idx="99">
+                  <c:v>0.7709</c:v>
+                </c:pt>
+                <c:pt idx="100">
+                  <c:v>0.9214</c:v>
+                </c:pt>
+                <c:pt idx="101">
+                  <c:v>0.8541</c:v>
+                </c:pt>
+                <c:pt idx="102">
+                  <c:v>0.9307</c:v>
+                </c:pt>
+                <c:pt idx="103">
+                  <c:v>0.763</c:v>
+                </c:pt>
+                <c:pt idx="104">
+                  <c:v>0.8069</c:v>
+                </c:pt>
+                <c:pt idx="105">
+                  <c:v>0.8098</c:v>
+                </c:pt>
+                <c:pt idx="106">
+                  <c:v>0.9231</c:v>
+                </c:pt>
+                <c:pt idx="107">
+                  <c:v>0.9053</c:v>
+                </c:pt>
+                <c:pt idx="108">
+                  <c:v>0.7967</c:v>
+                </c:pt>
+                <c:pt idx="109">
+                  <c:v>0.8918</c:v>
+                </c:pt>
+                <c:pt idx="110">
+                  <c:v>0.5053</c:v>
+                </c:pt>
+                <c:pt idx="111">
+                  <c:v>0.8316</c:v>
+                </c:pt>
+                <c:pt idx="112">
+                  <c:v>0.9461</c:v>
+                </c:pt>
+                <c:pt idx="113">
+                  <c:v>0.8159</c:v>
+                </c:pt>
+                <c:pt idx="114">
+                  <c:v>0.8835</c:v>
+                </c:pt>
+                <c:pt idx="115">
+                  <c:v>0.7592</c:v>
+                </c:pt>
+                <c:pt idx="116">
+                  <c:v>0.8745</c:v>
+                </c:pt>
+                <c:pt idx="117">
+                  <c:v>0.8015</c:v>
+                </c:pt>
+                <c:pt idx="118">
+                  <c:v>0.8398</c:v>
+                </c:pt>
+                <c:pt idx="119">
+                  <c:v>0.8336</c:v>
+                </c:pt>
+                <c:pt idx="120">
+                  <c:v>0.9023</c:v>
+                </c:pt>
+                <c:pt idx="121">
+                  <c:v>0.8586</c:v>
+                </c:pt>
+                <c:pt idx="122">
+                  <c:v>0.9104</c:v>
+                </c:pt>
+                <c:pt idx="123">
+                  <c:v>0.8982</c:v>
+                </c:pt>
+                <c:pt idx="124">
+                  <c:v>0.7186</c:v>
+                </c:pt>
+                <c:pt idx="125">
+                  <c:v>0.6192</c:v>
+                </c:pt>
+                <c:pt idx="126">
+                  <c:v>0.8692</c:v>
+                </c:pt>
+                <c:pt idx="127">
+                  <c:v>0.8513</c:v>
+                </c:pt>
+                <c:pt idx="128">
+                  <c:v>0.9037</c:v>
+                </c:pt>
+                <c:pt idx="129">
+                  <c:v>0.5316</c:v>
+                </c:pt>
+                <c:pt idx="130">
+                  <c:v>0.8286</c:v>
+                </c:pt>
+                <c:pt idx="131">
+                  <c:v>0.8694</c:v>
+                </c:pt>
+                <c:pt idx="132">
+                  <c:v>0.9318</c:v>
+                </c:pt>
+                <c:pt idx="133">
+                  <c:v>0.927</c:v>
+                </c:pt>
+                <c:pt idx="134">
+                  <c:v>0.918</c:v>
+                </c:pt>
+                <c:pt idx="135">
+                  <c:v>0.8398</c:v>
+                </c:pt>
+                <c:pt idx="136">
+                  <c:v>0.7765</c:v>
+                </c:pt>
+                <c:pt idx="137">
+                  <c:v>0.8162</c:v>
+                </c:pt>
+                <c:pt idx="138">
+                  <c:v>0.688</c:v>
+                </c:pt>
+                <c:pt idx="139">
+                  <c:v>0.878</c:v>
+                </c:pt>
+                <c:pt idx="140">
+                  <c:v>0.8414</c:v>
+                </c:pt>
+                <c:pt idx="141">
+                  <c:v>0.7939</c:v>
+                </c:pt>
+                <c:pt idx="142">
+                  <c:v>0.8562</c:v>
+                </c:pt>
+                <c:pt idx="143">
+                  <c:v>0.8633</c:v>
+                </c:pt>
+                <c:pt idx="144">
+                  <c:v>0.9211</c:v>
+                </c:pt>
+                <c:pt idx="145">
+                  <c:v>0.6097</c:v>
+                </c:pt>
+                <c:pt idx="146">
+                  <c:v>0.8431</c:v>
+                </c:pt>
+                <c:pt idx="147">
+                  <c:v>0.8603</c:v>
+                </c:pt>
+                <c:pt idx="148">
+                  <c:v>0.8563</c:v>
+                </c:pt>
+                <c:pt idx="149">
+                  <c:v>0.9086</c:v>
+                </c:pt>
+                <c:pt idx="150">
+                  <c:v>0.9134</c:v>
+                </c:pt>
+                <c:pt idx="151">
+                  <c:v>0.9096</c:v>
+                </c:pt>
+                <c:pt idx="152">
+                  <c:v>0.6637</c:v>
+                </c:pt>
+                <c:pt idx="153">
+                  <c:v>0.8641</c:v>
+                </c:pt>
+                <c:pt idx="154">
+                  <c:v>0.7343</c:v>
+                </c:pt>
+                <c:pt idx="155">
+                  <c:v>0.8964</c:v>
+                </c:pt>
+                <c:pt idx="156">
+                  <c:v>1.0</c:v>
+                </c:pt>
+                <c:pt idx="157">
+                  <c:v>0.8378</c:v>
+                </c:pt>
+                <c:pt idx="158">
+                  <c:v>0.8392</c:v>
+                </c:pt>
+                <c:pt idx="159">
+                  <c:v>0.8244</c:v>
+                </c:pt>
+                <c:pt idx="160">
+                  <c:v>0.8182</c:v>
+                </c:pt>
+                <c:pt idx="161">
+                  <c:v>0.9117</c:v>
+                </c:pt>
+                <c:pt idx="162">
+                  <c:v>0.929</c:v>
+                </c:pt>
+                <c:pt idx="163">
+                  <c:v>0.9114</c:v>
+                </c:pt>
+                <c:pt idx="164">
+                  <c:v>0.8761</c:v>
+                </c:pt>
+                <c:pt idx="165">
+                  <c:v>0.8904</c:v>
+                </c:pt>
+                <c:pt idx="166">
+                  <c:v>0.8318</c:v>
+                </c:pt>
+                <c:pt idx="167">
+                  <c:v>0.9027</c:v>
+                </c:pt>
+                <c:pt idx="168">
+                  <c:v>0.7694</c:v>
+                </c:pt>
+                <c:pt idx="169">
+                  <c:v>0.748</c:v>
+                </c:pt>
+                <c:pt idx="170">
+                  <c:v>0.6091</c:v>
+                </c:pt>
+                <c:pt idx="171">
+                  <c:v>0.8465</c:v>
+                </c:pt>
+                <c:pt idx="172">
+                  <c:v>0.9484</c:v>
+                </c:pt>
+                <c:pt idx="173">
+                  <c:v>0.7374</c:v>
+                </c:pt>
+                <c:pt idx="174">
+                  <c:v>0.9036</c:v>
+                </c:pt>
+                <c:pt idx="175">
+                  <c:v>0.6929</c:v>
+                </c:pt>
+                <c:pt idx="176">
+                  <c:v>0.9129</c:v>
+                </c:pt>
+                <c:pt idx="177">
+                  <c:v>0.7738</c:v>
+                </c:pt>
+                <c:pt idx="178">
+                  <c:v>0.8776</c:v>
+                </c:pt>
+                <c:pt idx="179">
+                  <c:v>0.9101</c:v>
+                </c:pt>
+                <c:pt idx="180">
+                  <c:v>0.878</c:v>
+                </c:pt>
+                <c:pt idx="181">
+                  <c:v>0.9031</c:v>
+                </c:pt>
+                <c:pt idx="182">
+                  <c:v>0.843</c:v>
+                </c:pt>
+                <c:pt idx="183">
+                  <c:v>0.7509</c:v>
+                </c:pt>
+                <c:pt idx="184">
+                  <c:v>0.6272</c:v>
+                </c:pt>
+                <c:pt idx="185">
+                  <c:v>0.6756</c:v>
+                </c:pt>
+                <c:pt idx="186">
+                  <c:v>0.836</c:v>
+                </c:pt>
+                <c:pt idx="187">
+                  <c:v>0.3972</c:v>
+                </c:pt>
+                <c:pt idx="188">
+                  <c:v>0.8197</c:v>
+                </c:pt>
+                <c:pt idx="189">
+                  <c:v>0.5933</c:v>
+                </c:pt>
+                <c:pt idx="190">
+                  <c:v>0.9075</c:v>
+                </c:pt>
+                <c:pt idx="191">
+                  <c:v>0.8451</c:v>
+                </c:pt>
+                <c:pt idx="192">
+                  <c:v>0.8798</c:v>
+                </c:pt>
+                <c:pt idx="193">
+                  <c:v>0.8568</c:v>
+                </c:pt>
+                <c:pt idx="194">
+                  <c:v>0.846</c:v>
+                </c:pt>
+                <c:pt idx="195">
+                  <c:v>0.7353</c:v>
+                </c:pt>
+                <c:pt idx="196">
+                  <c:v>0.3919</c:v>
+                </c:pt>
+                <c:pt idx="197">
+                  <c:v>0.8457</c:v>
+                </c:pt>
+                <c:pt idx="198">
+                  <c:v>0.8792</c:v>
+                </c:pt>
+                <c:pt idx="199">
+                  <c:v>0.5491</c:v>
+                </c:pt>
+                <c:pt idx="200">
                   <c:v>0.7764</c:v>
                 </c:pt>
-                <c:pt idx="74">
-                  <c:v>0.4193</c:v>
-                </c:pt>
-                <c:pt idx="75">
-                  <c:v>0.4821</c:v>
-                </c:pt>
-                <c:pt idx="76">
-                  <c:v>0.3762</c:v>
-                </c:pt>
-                <c:pt idx="77">
-                  <c:v>0.3554</c:v>
-                </c:pt>
-                <c:pt idx="78">
-                  <c:v>0.2297</c:v>
-                </c:pt>
-                <c:pt idx="79">
-                  <c:v>0.7962</c:v>
-                </c:pt>
-                <c:pt idx="80">
-                  <c:v>0.1184</c:v>
-                </c:pt>
-                <c:pt idx="81">
-                  <c:v>0.0485</c:v>
-                </c:pt>
-                <c:pt idx="82">
-                  <c:v>0.4444</c:v>
-                </c:pt>
-                <c:pt idx="83">
-                  <c:v>0.1538</c:v>
-                </c:pt>
-                <c:pt idx="84">
-                  <c:v>0.8337</c:v>
-                </c:pt>
-                <c:pt idx="85">
-                  <c:v>0.5951</c:v>
-                </c:pt>
-                <c:pt idx="86">
-                  <c:v>0.5628</c:v>
-                </c:pt>
-                <c:pt idx="87">
-                  <c:v>0.8008</c:v>
-                </c:pt>
-                <c:pt idx="88">
-                  <c:v>0.6544</c:v>
-                </c:pt>
-                <c:pt idx="89">
-                  <c:v>0.3252</c:v>
-                </c:pt>
-                <c:pt idx="90">
-                  <c:v>0.144</c:v>
-                </c:pt>
-                <c:pt idx="91">
-                  <c:v>0.0824</c:v>
-                </c:pt>
-                <c:pt idx="92">
-                  <c:v>0.8096</c:v>
-                </c:pt>
-                <c:pt idx="93">
-                  <c:v>0.1639</c:v>
-                </c:pt>
-                <c:pt idx="94">
-                  <c:v>0.3689</c:v>
-                </c:pt>
-                <c:pt idx="95">
-                  <c:v>0.3163</c:v>
-                </c:pt>
-                <c:pt idx="96">
-                  <c:v>0.3828</c:v>
-                </c:pt>
-                <c:pt idx="97">
-                  <c:v>0.3558</c:v>
-                </c:pt>
-                <c:pt idx="98">
-                  <c:v>0.117</c:v>
-                </c:pt>
-                <c:pt idx="99">
-                  <c:v>0.1923</c:v>
-                </c:pt>
-                <c:pt idx="100">
-                  <c:v>0.9511</c:v>
-                </c:pt>
-                <c:pt idx="101">
-                  <c:v>0.6351</c:v>
-                </c:pt>
-                <c:pt idx="102">
-                  <c:v>0.7734</c:v>
-                </c:pt>
-                <c:pt idx="103">
-                  <c:v>0.1095</c:v>
-                </c:pt>
-                <c:pt idx="104">
-                  <c:v>0.1711</c:v>
-                </c:pt>
-                <c:pt idx="105">
-                  <c:v>0.1097</c:v>
-                </c:pt>
-                <c:pt idx="106">
-                  <c:v>0.6876</c:v>
-                </c:pt>
-                <c:pt idx="107">
-                  <c:v>0.5144</c:v>
-                </c:pt>
-                <c:pt idx="108">
-                  <c:v>0.2334</c:v>
-                </c:pt>
-                <c:pt idx="109">
-                  <c:v>0.2627</c:v>
-                </c:pt>
-                <c:pt idx="110">
-                  <c:v>0.118</c:v>
-                </c:pt>
-                <c:pt idx="111">
-                  <c:v>0.4857</c:v>
-                </c:pt>
-                <c:pt idx="112">
-                  <c:v>0.9002</c:v>
-                </c:pt>
-                <c:pt idx="113">
-                  <c:v>0.3514</c:v>
-                </c:pt>
-                <c:pt idx="114">
-                  <c:v>0.5681</c:v>
-                </c:pt>
-                <c:pt idx="115">
-                  <c:v>0.0736</c:v>
-                </c:pt>
-                <c:pt idx="116">
-                  <c:v>1.0</c:v>
-                </c:pt>
-                <c:pt idx="117">
-                  <c:v>0.1742</c:v>
-                </c:pt>
-                <c:pt idx="118">
-                  <c:v>0.1952</c:v>
-                </c:pt>
-                <c:pt idx="119">
-                  <c:v>0.4901</c:v>
-                </c:pt>
-                <c:pt idx="120">
-                  <c:v>0.6909</c:v>
-                </c:pt>
-                <c:pt idx="121">
-                  <c:v>0.1565</c:v>
-                </c:pt>
-                <c:pt idx="122">
+                <c:pt idx="201">
+                  <c:v>0.6949</c:v>
+                </c:pt>
+                <c:pt idx="202">
+                  <c:v>0.843</c:v>
+                </c:pt>
+                <c:pt idx="203">
+                  <c:v>0.8881</c:v>
+                </c:pt>
+                <c:pt idx="204">
+                  <c:v>0.6893</c:v>
+                </c:pt>
+                <c:pt idx="205">
+                  <c:v>0.8077</c:v>
+                </c:pt>
+                <c:pt idx="206">
+                  <c:v>0.9037</c:v>
+                </c:pt>
+                <c:pt idx="207">
+                  <c:v>0.8816</c:v>
+                </c:pt>
+                <c:pt idx="208">
+                  <c:v>0.7853</c:v>
+                </c:pt>
+                <c:pt idx="209">
+                  <c:v>0.8032</c:v>
+                </c:pt>
+                <c:pt idx="210">
+                  <c:v>0.7358</c:v>
+                </c:pt>
+                <c:pt idx="211">
+                  <c:v>0.8564</c:v>
+                </c:pt>
+                <c:pt idx="212">
+                  <c:v>0.9046</c:v>
+                </c:pt>
+                <c:pt idx="213">
+                  <c:v>0.8953</c:v>
+                </c:pt>
+                <c:pt idx="214">
+                  <c:v>0.8872</c:v>
+                </c:pt>
+                <c:pt idx="215">
+                  <c:v>0.7457</c:v>
+                </c:pt>
+                <c:pt idx="216">
+                  <c:v>0.9337</c:v>
+                </c:pt>
+                <c:pt idx="217">
+                  <c:v>0.8593</c:v>
+                </c:pt>
+                <c:pt idx="218">
+                  <c:v>0.8719</c:v>
+                </c:pt>
+                <c:pt idx="219">
+                  <c:v>0.9155</c:v>
+                </c:pt>
+                <c:pt idx="220">
+                  <c:v>0.8391</c:v>
+                </c:pt>
+                <c:pt idx="221">
+                  <c:v>0.5582</c:v>
+                </c:pt>
+                <c:pt idx="222">
                   <c:v>0.6643</c:v>
                 </c:pt>
-                <c:pt idx="123">
-                  <c:v>0.7522</c:v>
-                </c:pt>
-                <c:pt idx="124">
-                  <c:v>0.2399</c:v>
-                </c:pt>
-                <c:pt idx="125">
-                  <c:v>0.1198</c:v>
-                </c:pt>
-                <c:pt idx="126">
-                  <c:v>0.5474</c:v>
-                </c:pt>
-                <c:pt idx="127">
-                  <c:v>0.1207</c:v>
-                </c:pt>
-                <c:pt idx="128">
-                  <c:v>0.4878</c:v>
-                </c:pt>
-                <c:pt idx="129">
-                  <c:v>0.1136</c:v>
-                </c:pt>
-                <c:pt idx="130">
-                  <c:v>0.5066</c:v>
-                </c:pt>
-                <c:pt idx="131">
-                  <c:v>0.7604</c:v>
-                </c:pt>
-                <c:pt idx="132">
-                  <c:v>0.6489</c:v>
-                </c:pt>
-                <c:pt idx="133">
-                  <c:v>0.3624</c:v>
-                </c:pt>
-                <c:pt idx="134">
-                  <c:v>0.5024</c:v>
-                </c:pt>
-                <c:pt idx="135">
-                  <c:v>0.1903</c:v>
-                </c:pt>
-                <c:pt idx="136">
-                  <c:v>0.0785</c:v>
-                </c:pt>
-                <c:pt idx="137">
-                  <c:v>0.3423</c:v>
-                </c:pt>
-                <c:pt idx="138">
-                  <c:v>0.6052</c:v>
-                </c:pt>
-                <c:pt idx="139">
-                  <c:v>0.4772</c:v>
-                </c:pt>
-                <c:pt idx="140">
-                  <c:v>0.6928</c:v>
-                </c:pt>
-                <c:pt idx="141">
-                  <c:v>0.0893</c:v>
-                </c:pt>
-                <c:pt idx="142">
-                  <c:v>0.428</c:v>
-                </c:pt>
-                <c:pt idx="143">
-                  <c:v>0.3346</c:v>
-                </c:pt>
-                <c:pt idx="144">
-                  <c:v>0.6497</c:v>
-                </c:pt>
-                <c:pt idx="145">
-                  <c:v>0.0973</c:v>
-                </c:pt>
-                <c:pt idx="146">
-                  <c:v>0.4201</c:v>
-                </c:pt>
-                <c:pt idx="147">
-                  <c:v>0.6011</c:v>
-                </c:pt>
-                <c:pt idx="148">
-                  <c:v>0.4392</c:v>
-                </c:pt>
-                <c:pt idx="149">
-                  <c:v>0.3167</c:v>
-                </c:pt>
-                <c:pt idx="150">
-                  <c:v>0.8106</c:v>
-                </c:pt>
-                <c:pt idx="151">
-                  <c:v>0.5423</c:v>
-                </c:pt>
-                <c:pt idx="152">
-                  <c:v>0.2064</c:v>
-                </c:pt>
-                <c:pt idx="153">
-                  <c:v>0.6208</c:v>
-                </c:pt>
-                <c:pt idx="154">
-                  <c:v>0.0872</c:v>
-                </c:pt>
-                <c:pt idx="155">
-                  <c:v>0.5205</c:v>
-                </c:pt>
-                <c:pt idx="156">
-                  <c:v>0.6411</c:v>
-                </c:pt>
-                <c:pt idx="157">
-                  <c:v>0.1314</c:v>
-                </c:pt>
-                <c:pt idx="158">
-                  <c:v>0.1301</c:v>
-                </c:pt>
-                <c:pt idx="159">
-                  <c:v>0.5705</c:v>
-                </c:pt>
-                <c:pt idx="160">
-                  <c:v>0.2845</c:v>
-                </c:pt>
-                <c:pt idx="161">
-                  <c:v>0.822</c:v>
-                </c:pt>
-                <c:pt idx="162">
-                  <c:v>0.8689</c:v>
-                </c:pt>
-                <c:pt idx="163">
-                  <c:v>0.7304</c:v>
-                </c:pt>
-                <c:pt idx="164">
-                  <c:v>0.3847</c:v>
-                </c:pt>
-                <c:pt idx="165">
-                  <c:v>0.5295</c:v>
-                </c:pt>
-                <c:pt idx="166">
-                  <c:v>0.1124</c:v>
-                </c:pt>
-                <c:pt idx="167">
-                  <c:v>0.5403</c:v>
-                </c:pt>
-                <c:pt idx="168">
-                  <c:v>0.0969</c:v>
-                </c:pt>
-                <c:pt idx="169">
-                  <c:v>0.3965</c:v>
-                </c:pt>
-                <c:pt idx="170">
-                  <c:v>0.0632</c:v>
-                </c:pt>
-                <c:pt idx="171">
-                  <c:v>0.3639</c:v>
-                </c:pt>
-                <c:pt idx="172">
-                  <c:v>0.8124</c:v>
-                </c:pt>
-                <c:pt idx="173">
-                  <c:v>0.1934</c:v>
-                </c:pt>
-                <c:pt idx="174">
-                  <c:v>0.6882</c:v>
-                </c:pt>
-                <c:pt idx="175">
-                  <c:v>0.3065</c:v>
-                </c:pt>
-                <c:pt idx="176">
-                  <c:v>0.9989</c:v>
-                </c:pt>
-                <c:pt idx="177">
-                  <c:v>0.1064</c:v>
-                </c:pt>
-                <c:pt idx="178">
-                  <c:v>0.7521</c:v>
-                </c:pt>
-                <c:pt idx="179">
-                  <c:v>0.8591</c:v>
-                </c:pt>
-                <c:pt idx="180">
-                  <c:v>0.6617</c:v>
-                </c:pt>
-                <c:pt idx="181">
-                  <c:v>0.1244</c:v>
-                </c:pt>
-                <c:pt idx="182">
-                  <c:v>0.4477</c:v>
-                </c:pt>
-                <c:pt idx="183">
-                  <c:v>0.0877</c:v>
-                </c:pt>
-                <c:pt idx="184">
-                  <c:v>0.1319</c:v>
-                </c:pt>
-                <c:pt idx="185">
-                  <c:v>0.0891</c:v>
-                </c:pt>
-                <c:pt idx="186">
-                  <c:v>0.1929</c:v>
-                </c:pt>
-                <c:pt idx="187">
-                  <c:v>0.0517</c:v>
-                </c:pt>
-                <c:pt idx="188">
-                  <c:v>0.4943</c:v>
-                </c:pt>
-                <c:pt idx="189">
-                  <c:v>0.0902</c:v>
-                </c:pt>
-                <c:pt idx="190">
-                  <c:v>0.7242</c:v>
-                </c:pt>
-                <c:pt idx="191">
-                  <c:v>0.3097</c:v>
-                </c:pt>
-                <c:pt idx="192">
-                  <c:v>0.5343</c:v>
-                </c:pt>
-                <c:pt idx="193">
-                  <c:v>0.2723</c:v>
-                </c:pt>
-                <c:pt idx="194">
-                  <c:v>0.5906</c:v>
-                </c:pt>
-                <c:pt idx="195">
-                  <c:v>0.084</c:v>
-                </c:pt>
-                <c:pt idx="196">
-                  <c:v>0.0326</c:v>
-                </c:pt>
-                <c:pt idx="197">
-                  <c:v>0.4052</c:v>
-                </c:pt>
-                <c:pt idx="198">
-                  <c:v>0.6849</c:v>
-                </c:pt>
-                <c:pt idx="199">
-                  <c:v>0.0411</c:v>
-                </c:pt>
-                <c:pt idx="200">
-                  <c:v>0.1314</c:v>
-                </c:pt>
-                <c:pt idx="201">
-                  <c:v>0.1422</c:v>
-                </c:pt>
-                <c:pt idx="202">
-                  <c:v>0.1603</c:v>
-                </c:pt>
-                <c:pt idx="203">
-                  <c:v>0.3442</c:v>
-                </c:pt>
-                <c:pt idx="204">
-                  <c:v>0.129</c:v>
-                </c:pt>
-                <c:pt idx="205">
-                  <c:v>0.4198</c:v>
-                </c:pt>
-                <c:pt idx="206">
-                  <c:v>0.5934</c:v>
-                </c:pt>
-                <c:pt idx="207">
-                  <c:v>0.7387</c:v>
-                </c:pt>
-                <c:pt idx="208">
-                  <c:v>0.1692</c:v>
-                </c:pt>
-                <c:pt idx="209">
-                  <c:v>0.1585</c:v>
-                </c:pt>
-                <c:pt idx="210">
-                  <c:v>0.173</c:v>
-                </c:pt>
-                <c:pt idx="211">
-                  <c:v>0.5383</c:v>
-                </c:pt>
-                <c:pt idx="212">
-                  <c:v>0.7218</c:v>
-                </c:pt>
-                <c:pt idx="213">
-                  <c:v>0.7175</c:v>
-                </c:pt>
-                <c:pt idx="214">
-                  <c:v>0.6379</c:v>
-                </c:pt>
-                <c:pt idx="215">
-                  <c:v>0.0943</c:v>
-                </c:pt>
-                <c:pt idx="216">
-                  <c:v>0.4379</c:v>
-                </c:pt>
-                <c:pt idx="217">
-                  <c:v>0.9216</c:v>
-                </c:pt>
-                <c:pt idx="218">
-                  <c:v>0.3201</c:v>
-                </c:pt>
-                <c:pt idx="219">
-                  <c:v>0.7236</c:v>
-                </c:pt>
-                <c:pt idx="220">
-                  <c:v>0.1513</c:v>
-                </c:pt>
-                <c:pt idx="221">
-                  <c:v>0.0878</c:v>
-                </c:pt>
-                <c:pt idx="222">
-                  <c:v>0.1418</c:v>
-                </c:pt>
                 <c:pt idx="223">
-                  <c:v>0.1928</c:v>
+                  <c:v>0.8426</c:v>
                 </c:pt>
                 <c:pt idx="224">
-                  <c:v>0.3443</c:v>
+                  <c:v>0.8785</c:v>
                 </c:pt>
                 <c:pt idx="225">
-                  <c:v>0.3653</c:v>
+                  <c:v>0.8205</c:v>
                 </c:pt>
                 <c:pt idx="226">
-                  <c:v>0.2332</c:v>
+                  <c:v>0.7819</c:v>
                 </c:pt>
                 <c:pt idx="227">
-                  <c:v>0.082</c:v>
+                  <c:v>0.6716</c:v>
                 </c:pt>
                 <c:pt idx="228">
-                  <c:v>0.6631</c:v>
+                  <c:v>0.8066</c:v>
                 </c:pt>
                 <c:pt idx="229">
-                  <c:v>0.2169</c:v>
+                  <c:v>0.8772</c:v>
                 </c:pt>
                 <c:pt idx="230">
-                  <c:v>0.048</c:v>
+                  <c:v>0.3113</c:v>
                 </c:pt>
                 <c:pt idx="231">
-                  <c:v>0.0802</c:v>
+                  <c:v>0.6556</c:v>
                 </c:pt>
                 <c:pt idx="232">
-                  <c:v>0.6974</c:v>
+                  <c:v>0.9229</c:v>
                 </c:pt>
                 <c:pt idx="233">
-                  <c:v>0.5461</c:v>
+                  <c:v>0.9167</c:v>
                 </c:pt>
                 <c:pt idx="234">
-                  <c:v>0.8552</c:v>
+                  <c:v>0.9267</c:v>
                 </c:pt>
                 <c:pt idx="235">
-                  <c:v>0.1132</c:v>
+                  <c:v>0.7799</c:v>
                 </c:pt>
                 <c:pt idx="236">
-                  <c:v>0.5577</c:v>
+                  <c:v>0.893</c:v>
                 </c:pt>
                 <c:pt idx="237">
-                  <c:v>0.0925</c:v>
+                  <c:v>0.5475</c:v>
                 </c:pt>
                 <c:pt idx="238">
-                  <c:v>0.0577</c:v>
+                  <c:v>0.6106</c:v>
                 </c:pt>
                 <c:pt idx="239">
-                  <c:v>0.76</c:v>
+                  <c:v>0.9051</c:v>
                 </c:pt>
                 <c:pt idx="240">
-                  <c:v>0.6197</c:v>
+                  <c:v>0.9096</c:v>
                 </c:pt>
                 <c:pt idx="241">
-                  <c:v>0.6375</c:v>
+                  <c:v>0.8891</c:v>
                 </c:pt>
                 <c:pt idx="242">
-                  <c:v>0.3645</c:v>
+                  <c:v>0.861</c:v>
                 </c:pt>
                 <c:pt idx="243">
-                  <c:v>0.3703</c:v>
+                  <c:v>0.8917</c:v>
                 </c:pt>
                 <c:pt idx="244">
-                  <c:v>0.7275</c:v>
+                  <c:v>0.8656</c:v>
                 </c:pt>
                 <c:pt idx="245">
-                  <c:v>0.6259</c:v>
+                  <c:v>0.8809</c:v>
                 </c:pt>
                 <c:pt idx="246">
-                  <c:v>0.0774</c:v>
+                  <c:v>0.6832</c:v>
                 </c:pt>
                 <c:pt idx="247">
-                  <c:v>0.1963</c:v>
+                  <c:v>0.6743</c:v>
                 </c:pt>
                 <c:pt idx="248">
-                  <c:v>0.5765</c:v>
+                  <c:v>0.8348</c:v>
                 </c:pt>
                 <c:pt idx="249">
-                  <c:v>0.0793</c:v>
+                  <c:v>0.6622</c:v>
                 </c:pt>
               </c:numCache>
             </c:numRef>
@@ -924,754 +924,754 @@
                 <c:formatCode>General</c:formatCode>
                 <c:ptCount val="250"/>
                 <c:pt idx="0">
-                  <c:v>0.0625</c:v>
+                  <c:v>0.3433</c:v>
                 </c:pt>
                 <c:pt idx="1">
-                  <c:v>0.2096</c:v>
+                  <c:v>0.512</c:v>
                 </c:pt>
                 <c:pt idx="2">
-                  <c:v>0.054</c:v>
+                  <c:v>0.4612</c:v>
                 </c:pt>
                 <c:pt idx="3">
-                  <c:v>0.1556</c:v>
+                  <c:v>0.4856</c:v>
                 </c:pt>
                 <c:pt idx="4">
-                  <c:v>0.0642</c:v>
+                  <c:v>0.3166</c:v>
                 </c:pt>
                 <c:pt idx="5">
-                  <c:v>0.3551</c:v>
+                  <c:v>0.5888</c:v>
                 </c:pt>
                 <c:pt idx="6">
-                  <c:v>0.269</c:v>
+                  <c:v>0.5155</c:v>
                 </c:pt>
                 <c:pt idx="7">
-                  <c:v>0.0768</c:v>
+                  <c:v>0.3177</c:v>
                 </c:pt>
                 <c:pt idx="8">
-                  <c:v>0.2331</c:v>
+                  <c:v>0.5168</c:v>
                 </c:pt>
                 <c:pt idx="9">
-                  <c:v>0.2773</c:v>
+                  <c:v>0.5581</c:v>
                 </c:pt>
                 <c:pt idx="10">
-                  <c:v>0.2398</c:v>
+                  <c:v>0.4595</c:v>
                 </c:pt>
                 <c:pt idx="11">
-                  <c:v>0.3028</c:v>
+                  <c:v>0.5918</c:v>
                 </c:pt>
                 <c:pt idx="12">
-                  <c:v>0.1429</c:v>
+                  <c:v>0.5502</c:v>
                 </c:pt>
                 <c:pt idx="13">
-                  <c:v>0.0915</c:v>
+                  <c:v>0.5207</c:v>
                 </c:pt>
                 <c:pt idx="14">
-                  <c:v>0.0834</c:v>
+                  <c:v>0.2304</c:v>
                 </c:pt>
                 <c:pt idx="15">
-                  <c:v>0.0591</c:v>
+                  <c:v>0.5935</c:v>
                 </c:pt>
                 <c:pt idx="16">
-                  <c:v>0.1227</c:v>
+                  <c:v>0.4965</c:v>
                 </c:pt>
                 <c:pt idx="17">
-                  <c:v>0.0626</c:v>
+                  <c:v>0.3241</c:v>
                 </c:pt>
                 <c:pt idx="18">
-                  <c:v>0.0597</c:v>
+                  <c:v>0.4251</c:v>
                 </c:pt>
                 <c:pt idx="19">
-                  <c:v>0.014</c:v>
+                  <c:v>0.2298</c:v>
                 </c:pt>
                 <c:pt idx="20">
-                  <c:v>0.156</c:v>
+                  <c:v>0.4721</c:v>
                 </c:pt>
                 <c:pt idx="21">
-                  <c:v>0.085</c:v>
+                  <c:v>0.4004</c:v>
                 </c:pt>
                 <c:pt idx="22">
-                  <c:v>0.0766</c:v>
+                  <c:v>0.3891</c:v>
                 </c:pt>
                 <c:pt idx="23">
-                  <c:v>0.1315</c:v>
+                  <c:v>0.3392</c:v>
                 </c:pt>
                 <c:pt idx="24">
-                  <c:v>0.2565</c:v>
+                  <c:v>0.5625</c:v>
                 </c:pt>
                 <c:pt idx="25">
-                  <c:v>0.0467</c:v>
+                  <c:v>0.4267</c:v>
                 </c:pt>
                 <c:pt idx="26">
-                  <c:v>0.108</c:v>
+                  <c:v>0.2903</c:v>
                 </c:pt>
                 <c:pt idx="27">
-                  <c:v>0.0434</c:v>
+                  <c:v>0.3965</c:v>
                 </c:pt>
                 <c:pt idx="28">
-                  <c:v>0.2882</c:v>
+                  <c:v>0.5196</c:v>
                 </c:pt>
                 <c:pt idx="29">
-                  <c:v>0.0335</c:v>
+                  <c:v>0.3765</c:v>
                 </c:pt>
                 <c:pt idx="30">
-                  <c:v>0.0521</c:v>
+                  <c:v>0.2014</c:v>
                 </c:pt>
                 <c:pt idx="31">
-                  <c:v>0.0653</c:v>
+                  <c:v>0.3154</c:v>
                 </c:pt>
                 <c:pt idx="32">
-                  <c:v>0.1509</c:v>
+                  <c:v>0.4728</c:v>
                 </c:pt>
                 <c:pt idx="33">
-                  <c:v>0.174</c:v>
+                  <c:v>0.4835</c:v>
                 </c:pt>
                 <c:pt idx="34">
-                  <c:v>0.0497</c:v>
+                  <c:v>0.4198</c:v>
                 </c:pt>
                 <c:pt idx="35">
-                  <c:v>0.0189</c:v>
+                  <c:v>0.4889</c:v>
                 </c:pt>
                 <c:pt idx="36">
-                  <c:v>0.1595</c:v>
+                  <c:v>0.5044</c:v>
                 </c:pt>
                 <c:pt idx="37">
-                  <c:v>0.1378</c:v>
+                  <c:v>0.3371</c:v>
                 </c:pt>
                 <c:pt idx="38">
-                  <c:v>0.0533</c:v>
+                  <c:v>0.1986</c:v>
                 </c:pt>
                 <c:pt idx="39">
-                  <c:v>0.2008</c:v>
+                  <c:v>0.5056</c:v>
                 </c:pt>
                 <c:pt idx="40">
-                  <c:v>0.0762</c:v>
+                  <c:v>0.3782</c:v>
                 </c:pt>
                 <c:pt idx="41">
-                  <c:v>0.1941</c:v>
+                  <c:v>0.4982</c:v>
                 </c:pt>
                 <c:pt idx="42">
-                  <c:v>0.1871</c:v>
+                  <c:v>0.4644</c:v>
                 </c:pt>
                 <c:pt idx="43">
-                  <c:v>0.1691</c:v>
+                  <c:v>0.5459</c:v>
                 </c:pt>
                 <c:pt idx="44">
-                  <c:v>0.0348</c:v>
+                  <c:v>0.3103</c:v>
                 </c:pt>
                 <c:pt idx="45">
-                  <c:v>0.1424</c:v>
+                  <c:v>0.447</c:v>
                 </c:pt>
                 <c:pt idx="46">
-                  <c:v>0.0861</c:v>
+                  <c:v>0.4089</c:v>
                 </c:pt>
                 <c:pt idx="47">
-                  <c:v>0.1337</c:v>
+                  <c:v>0.4227</c:v>
                 </c:pt>
                 <c:pt idx="48">
-                  <c:v>0.038</c:v>
+                  <c:v>0.2833</c:v>
                 </c:pt>
                 <c:pt idx="49">
-                  <c:v>0.3045</c:v>
+                  <c:v>0.5216</c:v>
                 </c:pt>
                 <c:pt idx="50">
-                  <c:v>0.0168</c:v>
+                  <c:v>0.1673</c:v>
                 </c:pt>
                 <c:pt idx="51">
-                  <c:v>0.1985</c:v>
+                  <c:v>0.5841</c:v>
                 </c:pt>
                 <c:pt idx="52">
-                  <c:v>0.3182</c:v>
+                  <c:v>0.5106</c:v>
                 </c:pt>
                 <c:pt idx="53">
-                  <c:v>0.1581</c:v>
+                  <c:v>0.5137</c:v>
                 </c:pt>
                 <c:pt idx="54">
-                  <c:v>0.1232</c:v>
+                  <c:v>0.4376</c:v>
                 </c:pt>
                 <c:pt idx="55">
-                  <c:v>0.2389</c:v>
+                  <c:v>0.2295</c:v>
                 </c:pt>
                 <c:pt idx="56">
-                  <c:v>0.1734</c:v>
+                  <c:v>0.5218</c:v>
                 </c:pt>
                 <c:pt idx="57">
-                  <c:v>0.222</c:v>
+                  <c:v>0.5397</c:v>
                 </c:pt>
                 <c:pt idx="58">
-                  <c:v>0.2554</c:v>
+                  <c:v>0.4837</c:v>
                 </c:pt>
                 <c:pt idx="59">
-                  <c:v>0.2273</c:v>
+                  <c:v>0.491</c:v>
                 </c:pt>
                 <c:pt idx="60">
-                  <c:v>0.0825</c:v>
+                  <c:v>0.3932</c:v>
                 </c:pt>
                 <c:pt idx="61">
-                  <c:v>0.0621</c:v>
+                  <c:v>0.4075</c:v>
                 </c:pt>
                 <c:pt idx="62">
-                  <c:v>0.1145</c:v>
+                  <c:v>0.4581</c:v>
                 </c:pt>
                 <c:pt idx="63">
-                  <c:v>0.0717</c:v>
+                  <c:v>0.3348</c:v>
                 </c:pt>
                 <c:pt idx="64">
-                  <c:v>0.0546</c:v>
+                  <c:v>0.2929</c:v>
                 </c:pt>
                 <c:pt idx="65">
-                  <c:v>0.2752</c:v>
+                  <c:v>0.4966</c:v>
                 </c:pt>
                 <c:pt idx="66">
-                  <c:v>0.4178</c:v>
+                  <c:v>0.4689</c:v>
                 </c:pt>
                 <c:pt idx="67">
-                  <c:v>0.067</c:v>
+                  <c:v>0.2889</c:v>
                 </c:pt>
                 <c:pt idx="68">
-                  <c:v>0.0153</c:v>
+                  <c:v>0.218</c:v>
                 </c:pt>
                 <c:pt idx="69">
-                  <c:v>0.0332</c:v>
+                  <c:v>0.4647</c:v>
                 </c:pt>
                 <c:pt idx="70">
-                  <c:v>0.1588</c:v>
+                  <c:v>0.4806</c:v>
                 </c:pt>
                 <c:pt idx="71">
-                  <c:v>0.1314</c:v>
+                  <c:v>0.5379</c:v>
                 </c:pt>
                 <c:pt idx="72">
-                  <c:v>0.1803</c:v>
+                  <c:v>0.4753</c:v>
                 </c:pt>
                 <c:pt idx="73">
-                  <c:v>0.2663</c:v>
+                  <c:v>0.5212</c:v>
                 </c:pt>
                 <c:pt idx="74">
-                  <c:v>0.1203</c:v>
+                  <c:v>0.4767</c:v>
                 </c:pt>
                 <c:pt idx="75">
-                  <c:v>0.1443</c:v>
+                  <c:v>0.5183</c:v>
                 </c:pt>
                 <c:pt idx="76">
-                  <c:v>0.1038</c:v>
+                  <c:v>0.4814</c:v>
                 </c:pt>
                 <c:pt idx="77">
-                  <c:v>0.0941</c:v>
+                  <c:v>0.4534</c:v>
                 </c:pt>
                 <c:pt idx="78">
-                  <c:v>0.0644</c:v>
+                  <c:v>0.6006</c:v>
                 </c:pt>
                 <c:pt idx="79">
-                  <c:v>0.2783</c:v>
+                  <c:v>0.5317</c:v>
                 </c:pt>
                 <c:pt idx="80">
-                  <c:v>0.032</c:v>
+                  <c:v>0.2528</c:v>
                 </c:pt>
                 <c:pt idx="81">
-                  <c:v>0.439</c:v>
+                  <c:v>0.3474</c:v>
                 </c:pt>
                 <c:pt idx="82">
-                  <c:v>0.1305</c:v>
+                  <c:v>0.5081</c:v>
                 </c:pt>
                 <c:pt idx="83">
-                  <c:v>0.0304</c:v>
+                  <c:v>0.3116</c:v>
                 </c:pt>
                 <c:pt idx="84">
-                  <c:v>0.2943</c:v>
+                  <c:v>0.547</c:v>
                 </c:pt>
                 <c:pt idx="85">
-                  <c:v>0.2018</c:v>
+                  <c:v>0.5311</c:v>
                 </c:pt>
                 <c:pt idx="86">
-                  <c:v>0.1794</c:v>
+                  <c:v>0.504</c:v>
                 </c:pt>
                 <c:pt idx="87">
+                  <c:v>0.5137</c:v>
+                </c:pt>
+                <c:pt idx="88">
+                  <c:v>0.5454</c:v>
+                </c:pt>
+                <c:pt idx="89">
+                  <c:v>0.4078</c:v>
+                </c:pt>
+                <c:pt idx="90">
+                  <c:v>0.3321</c:v>
+                </c:pt>
+                <c:pt idx="91">
+                  <c:v>0.3237</c:v>
+                </c:pt>
+                <c:pt idx="92">
+                  <c:v>0.4264</c:v>
+                </c:pt>
+                <c:pt idx="93">
+                  <c:v>0.2309</c:v>
+                </c:pt>
+                <c:pt idx="94">
+                  <c:v>0.4057</c:v>
+                </c:pt>
+                <c:pt idx="95">
+                  <c:v>0.4695</c:v>
+                </c:pt>
+                <c:pt idx="96">
+                  <c:v>0.4111</c:v>
+                </c:pt>
+                <c:pt idx="97">
+                  <c:v>0.536</c:v>
+                </c:pt>
+                <c:pt idx="98">
+                  <c:v>0.319</c:v>
+                </c:pt>
+                <c:pt idx="99">
+                  <c:v>0.4077</c:v>
+                </c:pt>
+                <c:pt idx="100">
+                  <c:v>0.5775</c:v>
+                </c:pt>
+                <c:pt idx="101">
+                  <c:v>0.5928</c:v>
+                </c:pt>
+                <c:pt idx="102">
+                  <c:v>0.5572</c:v>
+                </c:pt>
+                <c:pt idx="103">
+                  <c:v>0.2676</c:v>
+                </c:pt>
+                <c:pt idx="104">
+                  <c:v>0.3821</c:v>
+                </c:pt>
+                <c:pt idx="105">
+                  <c:v>0.3342</c:v>
+                </c:pt>
+                <c:pt idx="106">
+                  <c:v>0.5392</c:v>
+                </c:pt>
+                <c:pt idx="107">
+                  <c:v>0.5637</c:v>
+                </c:pt>
+                <c:pt idx="108">
+                  <c:v>0.4295</c:v>
+                </c:pt>
+                <c:pt idx="109">
+                  <c:v>0.4303</c:v>
+                </c:pt>
+                <c:pt idx="110">
+                  <c:v>0.286</c:v>
+                </c:pt>
+                <c:pt idx="111">
+                  <c:v>0.3801</c:v>
+                </c:pt>
+                <c:pt idx="112">
+                  <c:v>0.5385</c:v>
+                </c:pt>
+                <c:pt idx="113">
+                  <c:v>0.4525</c:v>
+                </c:pt>
+                <c:pt idx="114">
+                  <c:v>0.5171</c:v>
+                </c:pt>
+                <c:pt idx="115">
+                  <c:v>0.2449</c:v>
+                </c:pt>
+                <c:pt idx="116">
+                  <c:v>0.4359</c:v>
+                </c:pt>
+                <c:pt idx="117">
+                  <c:v>0.4445</c:v>
+                </c:pt>
+                <c:pt idx="118">
+                  <c:v>0.4078</c:v>
+                </c:pt>
+                <c:pt idx="119">
+                  <c:v>0.5948</c:v>
+                </c:pt>
+                <c:pt idx="120">
+                  <c:v>0.4796</c:v>
+                </c:pt>
+                <c:pt idx="121">
+                  <c:v>0.449</c:v>
+                </c:pt>
+                <c:pt idx="122">
+                  <c:v>0.4899</c:v>
+                </c:pt>
+                <c:pt idx="123">
+                  <c:v>0.4463</c:v>
+                </c:pt>
+                <c:pt idx="124">
+                  <c:v>0.292</c:v>
+                </c:pt>
+                <c:pt idx="125">
+                  <c:v>0.4541</c:v>
+                </c:pt>
+                <c:pt idx="126">
+                  <c:v>0.5398</c:v>
+                </c:pt>
+                <c:pt idx="127">
+                  <c:v>0.3378</c:v>
+                </c:pt>
+                <c:pt idx="128">
+                  <c:v>0.5054</c:v>
+                </c:pt>
+                <c:pt idx="129">
+                  <c:v>0.3797</c:v>
+                </c:pt>
+                <c:pt idx="130">
+                  <c:v>0.4166</c:v>
+                </c:pt>
+                <c:pt idx="131">
+                  <c:v>0.3896</c:v>
+                </c:pt>
+                <c:pt idx="132">
+                  <c:v>0.5944</c:v>
+                </c:pt>
+                <c:pt idx="133">
+                  <c:v>0.471</c:v>
+                </c:pt>
+                <c:pt idx="134">
+                  <c:v>0.5971</c:v>
+                </c:pt>
+                <c:pt idx="135">
+                  <c:v>0.472</c:v>
+                </c:pt>
+                <c:pt idx="136">
+                  <c:v>0.2883</c:v>
+                </c:pt>
+                <c:pt idx="137">
+                  <c:v>0.4081</c:v>
+                </c:pt>
+                <c:pt idx="138">
+                  <c:v>0.4851</c:v>
+                </c:pt>
+                <c:pt idx="139">
+                  <c:v>0.4745</c:v>
+                </c:pt>
+                <c:pt idx="140">
+                  <c:v>0.5247</c:v>
+                </c:pt>
+                <c:pt idx="141">
+                  <c:v>0.3218</c:v>
+                </c:pt>
+                <c:pt idx="142">
+                  <c:v>0.4747</c:v>
+                </c:pt>
+                <c:pt idx="143">
+                  <c:v>0.4955</c:v>
+                </c:pt>
+                <c:pt idx="144">
+                  <c:v>0.5383</c:v>
+                </c:pt>
+                <c:pt idx="145">
+                  <c:v>0.5364</c:v>
+                </c:pt>
+                <c:pt idx="146">
+                  <c:v>0.4253</c:v>
+                </c:pt>
+                <c:pt idx="147">
+                  <c:v>0.4671</c:v>
+                </c:pt>
+                <c:pt idx="148">
+                  <c:v>0.4898</c:v>
+                </c:pt>
+                <c:pt idx="149">
+                  <c:v>0.4709</c:v>
+                </c:pt>
+                <c:pt idx="150">
+                  <c:v>0.5016</c:v>
+                </c:pt>
+                <c:pt idx="151">
+                  <c:v>0.5392</c:v>
+                </c:pt>
+                <c:pt idx="152">
+                  <c:v>0.5366</c:v>
+                </c:pt>
+                <c:pt idx="153">
+                  <c:v>0.5209</c:v>
+                </c:pt>
+                <c:pt idx="154">
+                  <c:v>0.2613</c:v>
+                </c:pt>
+                <c:pt idx="155">
+                  <c:v>0.5782</c:v>
+                </c:pt>
+                <c:pt idx="156">
+                  <c:v>0.5878</c:v>
+                </c:pt>
+                <c:pt idx="157">
+                  <c:v>0.3872</c:v>
+                </c:pt>
+                <c:pt idx="158">
+                  <c:v>0.427</c:v>
+                </c:pt>
+                <c:pt idx="159">
+                  <c:v>0.4649</c:v>
+                </c:pt>
+                <c:pt idx="160">
+                  <c:v>0.4265</c:v>
+                </c:pt>
+                <c:pt idx="161">
+                  <c:v>0.4746</c:v>
+                </c:pt>
+                <c:pt idx="162">
+                  <c:v>0.5436</c:v>
+                </c:pt>
+                <c:pt idx="163">
+                  <c:v>0.5149</c:v>
+                </c:pt>
+                <c:pt idx="164">
+                  <c:v>0.5252</c:v>
+                </c:pt>
+                <c:pt idx="165">
+                  <c:v>0.4894</c:v>
+                </c:pt>
+                <c:pt idx="166">
+                  <c:v>0.4388</c:v>
+                </c:pt>
+                <c:pt idx="167">
+                  <c:v>0.4594</c:v>
+                </c:pt>
+                <c:pt idx="168">
+                  <c:v>0.2786</c:v>
+                </c:pt>
+                <c:pt idx="169">
+                  <c:v>0.3508</c:v>
+                </c:pt>
+                <c:pt idx="170">
+                  <c:v>0.1751</c:v>
+                </c:pt>
+                <c:pt idx="171">
+                  <c:v>0.576</c:v>
+                </c:pt>
+                <c:pt idx="172">
+                  <c:v>0.5286</c:v>
+                </c:pt>
+                <c:pt idx="173">
+                  <c:v>0.4405</c:v>
+                </c:pt>
+                <c:pt idx="174">
+                  <c:v>0.5301</c:v>
+                </c:pt>
+                <c:pt idx="175">
+                  <c:v>0.4066</c:v>
+                </c:pt>
+                <c:pt idx="176">
+                  <c:v>0.5513</c:v>
+                </c:pt>
+                <c:pt idx="177">
+                  <c:v>0.2461</c:v>
+                </c:pt>
+                <c:pt idx="178">
+                  <c:v>0.5452</c:v>
+                </c:pt>
+                <c:pt idx="179">
+                  <c:v>0.6121</c:v>
+                </c:pt>
+                <c:pt idx="180">
+                  <c:v>0.5227</c:v>
+                </c:pt>
+                <c:pt idx="181">
+                  <c:v>0.4473</c:v>
+                </c:pt>
+                <c:pt idx="182">
+                  <c:v>0.5182</c:v>
+                </c:pt>
+                <c:pt idx="183">
+                  <c:v>0.27</c:v>
+                </c:pt>
+                <c:pt idx="184">
+                  <c:v>0.3834</c:v>
+                </c:pt>
+                <c:pt idx="185">
+                  <c:v>0.2358</c:v>
+                </c:pt>
+                <c:pt idx="186">
+                  <c:v>0.4021</c:v>
+                </c:pt>
+                <c:pt idx="187">
+                  <c:v>0.2284</c:v>
+                </c:pt>
+                <c:pt idx="188">
+                  <c:v>0.5108</c:v>
+                </c:pt>
+                <c:pt idx="189">
+                  <c:v>0.2431</c:v>
+                </c:pt>
+                <c:pt idx="190">
+                  <c:v>0.4913</c:v>
+                </c:pt>
+                <c:pt idx="191">
+                  <c:v>0.3696</c:v>
+                </c:pt>
+                <c:pt idx="192">
+                  <c:v>0.5273</c:v>
+                </c:pt>
+                <c:pt idx="193">
+                  <c:v>0.4086</c:v>
+                </c:pt>
+                <c:pt idx="194">
+                  <c:v>0.4383</c:v>
+                </c:pt>
+                <c:pt idx="195">
+                  <c:v>0.2997</c:v>
+                </c:pt>
+                <c:pt idx="196">
+                  <c:v>0.5464</c:v>
+                </c:pt>
+                <c:pt idx="197">
+                  <c:v>0.4888</c:v>
+                </c:pt>
+                <c:pt idx="198">
+                  <c:v>0.49</c:v>
+                </c:pt>
+                <c:pt idx="199">
+                  <c:v>0.2046</c:v>
+                </c:pt>
+                <c:pt idx="200">
+                  <c:v>0.3414</c:v>
+                </c:pt>
+                <c:pt idx="201">
+                  <c:v>0.3026</c:v>
+                </c:pt>
+                <c:pt idx="202">
+                  <c:v>0.3676</c:v>
+                </c:pt>
+                <c:pt idx="203">
+                  <c:v>0.4547</c:v>
+                </c:pt>
+                <c:pt idx="204">
+                  <c:v>0.3005</c:v>
+                </c:pt>
+                <c:pt idx="205">
+                  <c:v>0.4737</c:v>
+                </c:pt>
+                <c:pt idx="206">
+                  <c:v>0.5259</c:v>
+                </c:pt>
+                <c:pt idx="207">
+                  <c:v>0.5721</c:v>
+                </c:pt>
+                <c:pt idx="208">
+                  <c:v>0.4078</c:v>
+                </c:pt>
+                <c:pt idx="209">
+                  <c:v>0.3773</c:v>
+                </c:pt>
+                <c:pt idx="210">
+                  <c:v>0.4294</c:v>
+                </c:pt>
+                <c:pt idx="211">
+                  <c:v>0.4324</c:v>
+                </c:pt>
+                <c:pt idx="212">
+                  <c:v>0.5214</c:v>
+                </c:pt>
+                <c:pt idx="213">
+                  <c:v>0.4967</c:v>
+                </c:pt>
+                <c:pt idx="214">
+                  <c:v>0.6039</c:v>
+                </c:pt>
+                <c:pt idx="215">
+                  <c:v>0.3504</c:v>
+                </c:pt>
+                <c:pt idx="216">
+                  <c:v>0.5979</c:v>
+                </c:pt>
+                <c:pt idx="217">
+                  <c:v>0.4353</c:v>
+                </c:pt>
+                <c:pt idx="218">
+                  <c:v>0.4207</c:v>
+                </c:pt>
+                <c:pt idx="219">
+                  <c:v>0.4626</c:v>
+                </c:pt>
+                <c:pt idx="220">
+                  <c:v>0.4293</c:v>
+                </c:pt>
+                <c:pt idx="221">
+                  <c:v>0.2588</c:v>
+                </c:pt>
+                <c:pt idx="222">
+                  <c:v>0.1934</c:v>
+                </c:pt>
+                <c:pt idx="223">
+                  <c:v>0.4091</c:v>
+                </c:pt>
+                <c:pt idx="224">
+                  <c:v>0.4036</c:v>
+                </c:pt>
+                <c:pt idx="225">
+                  <c:v>0.4432</c:v>
+                </c:pt>
+                <c:pt idx="226">
+                  <c:v>0.5788</c:v>
+                </c:pt>
+                <c:pt idx="227">
+                  <c:v>0.1988</c:v>
+                </c:pt>
+                <c:pt idx="228">
+                  <c:v>0.4503</c:v>
+                </c:pt>
+                <c:pt idx="229">
+                  <c:v>0.4147</c:v>
+                </c:pt>
+                <c:pt idx="230">
+                  <c:v>0.6172</c:v>
+                </c:pt>
+                <c:pt idx="231">
+                  <c:v>0.2636</c:v>
+                </c:pt>
+                <c:pt idx="232">
+                  <c:v>0.5101</c:v>
+                </c:pt>
+                <c:pt idx="233">
+                  <c:v>0.517</c:v>
+                </c:pt>
+                <c:pt idx="234">
+                  <c:v>0.5503</c:v>
+                </c:pt>
+                <c:pt idx="235">
                   <c:v>0.2811</c:v>
                 </c:pt>
-                <c:pt idx="88">
-                  <c:v>0.2193</c:v>
-                </c:pt>
-                <c:pt idx="89">
-                  <c:v>0.0835</c:v>
-                </c:pt>
-                <c:pt idx="90">
-                  <c:v>0.0222</c:v>
-                </c:pt>
-                <c:pt idx="91">
-                  <c:v>0.1585</c:v>
-                </c:pt>
-                <c:pt idx="92">
-                  <c:v>0.2826</c:v>
-                </c:pt>
-                <c:pt idx="93">
-                  <c:v>0.0192</c:v>
-                </c:pt>
-                <c:pt idx="94">
-                  <c:v>0.1042</c:v>
-                </c:pt>
-                <c:pt idx="95">
-                  <c:v>0.0989</c:v>
-                </c:pt>
-                <c:pt idx="96">
-                  <c:v>0.1024</c:v>
-                </c:pt>
-                <c:pt idx="97">
-                  <c:v>0.0992</c:v>
-                </c:pt>
-                <c:pt idx="98">
-                  <c:v>0.0384</c:v>
-                </c:pt>
-                <c:pt idx="99">
-                  <c:v>0.0885</c:v>
-                </c:pt>
-                <c:pt idx="100">
-                  <c:v>0.3454</c:v>
-                </c:pt>
-                <c:pt idx="101">
-                  <c:v>0.2116</c:v>
-                </c:pt>
-                <c:pt idx="102">
-                  <c:v>0.2714</c:v>
-                </c:pt>
-                <c:pt idx="103">
-                  <c:v>0.0585</c:v>
-                </c:pt>
-                <c:pt idx="104">
-                  <c:v>0.0198</c:v>
-                </c:pt>
-                <c:pt idx="105">
-                  <c:v>0.0219</c:v>
-                </c:pt>
-                <c:pt idx="106">
-                  <c:v>0.23</c:v>
-                </c:pt>
-                <c:pt idx="107">
-                  <c:v>0.1646</c:v>
-                </c:pt>
-                <c:pt idx="108">
-                  <c:v>0.0506</c:v>
-                </c:pt>
-                <c:pt idx="109">
-                  <c:v>0.061</c:v>
-                </c:pt>
-                <c:pt idx="110">
-                  <c:v>0.0295</c:v>
-                </c:pt>
-                <c:pt idx="111">
-                  <c:v>0.1404</c:v>
-                </c:pt>
-                <c:pt idx="112">
-                  <c:v>0.336</c:v>
-                </c:pt>
-                <c:pt idx="113">
-                  <c:v>0.0924</c:v>
-                </c:pt>
-                <c:pt idx="114">
-                  <c:v>0.1857</c:v>
-                </c:pt>
-                <c:pt idx="115">
-                  <c:v>0.1289</c:v>
-                </c:pt>
-                <c:pt idx="116">
-                  <c:v>0.3644</c:v>
-                </c:pt>
-                <c:pt idx="117">
-                  <c:v>0.0493</c:v>
-                </c:pt>
-                <c:pt idx="118">
-                  <c:v>0.0401</c:v>
-                </c:pt>
-                <c:pt idx="119">
-                  <c:v>0.1494</c:v>
-                </c:pt>
-                <c:pt idx="120">
-                  <c:v>0.2374</c:v>
-                </c:pt>
-                <c:pt idx="121">
-                  <c:v>0.0085</c:v>
-                </c:pt>
-                <c:pt idx="122">
-                  <c:v>0.227</c:v>
-                </c:pt>
-                <c:pt idx="123">
-                  <c:v>0.2637</c:v>
-                </c:pt>
-                <c:pt idx="124">
-                  <c:v>0.043</c:v>
-                </c:pt>
-                <c:pt idx="125">
-                  <c:v>0.0611</c:v>
-                </c:pt>
-                <c:pt idx="126">
-                  <c:v>0.1759</c:v>
-                </c:pt>
-                <c:pt idx="127">
-                  <c:v>0.0</c:v>
-                </c:pt>
-                <c:pt idx="128">
-                  <c:v>0.146</c:v>
-                </c:pt>
-                <c:pt idx="129">
-                  <c:v>0.0136</c:v>
-                </c:pt>
-                <c:pt idx="130">
-                  <c:v>0.1576</c:v>
-                </c:pt>
-                <c:pt idx="131">
-                  <c:v>0.2611</c:v>
-                </c:pt>
-                <c:pt idx="132">
-                  <c:v>0.2228</c:v>
-                </c:pt>
-                <c:pt idx="133">
-                  <c:v>0.0947</c:v>
-                </c:pt>
-                <c:pt idx="134">
-                  <c:v>0.1511</c:v>
-                </c:pt>
-                <c:pt idx="135">
-                  <c:v>0.0457</c:v>
-                </c:pt>
-                <c:pt idx="136">
-                  <c:v>0.2007</c:v>
-                </c:pt>
-                <c:pt idx="137">
-                  <c:v>0.0887</c:v>
-                </c:pt>
-                <c:pt idx="138">
-                  <c:v>0.2214</c:v>
-                </c:pt>
-                <c:pt idx="139">
-                  <c:v>0.1491</c:v>
-                </c:pt>
-                <c:pt idx="140">
-                  <c:v>0.2411</c:v>
-                </c:pt>
-                <c:pt idx="141">
-                  <c:v>0.0402</c:v>
-                </c:pt>
-                <c:pt idx="142">
-                  <c:v>0.1254</c:v>
-                </c:pt>
-                <c:pt idx="143">
-                  <c:v>0.0859</c:v>
-                </c:pt>
-                <c:pt idx="144">
-                  <c:v>0.2204</c:v>
-                </c:pt>
-                <c:pt idx="145">
-                  <c:v>0.1499</c:v>
-                </c:pt>
-                <c:pt idx="146">
-                  <c:v>0.1232</c:v>
-                </c:pt>
-                <c:pt idx="147">
-                  <c:v>0.1967</c:v>
-                </c:pt>
-                <c:pt idx="148">
-                  <c:v>0.129</c:v>
-                </c:pt>
-                <c:pt idx="149">
-                  <c:v>0.0738</c:v>
-                </c:pt>
-                <c:pt idx="150">
-                  <c:v>0.291</c:v>
-                </c:pt>
-                <c:pt idx="151">
-                  <c:v>0.1696</c:v>
-                </c:pt>
-                <c:pt idx="152">
-                  <c:v>0.2241</c:v>
-                </c:pt>
-                <c:pt idx="153">
-                  <c:v>0.2041</c:v>
-                </c:pt>
-                <c:pt idx="154">
-                  <c:v>0.0443</c:v>
-                </c:pt>
-                <c:pt idx="155">
-                  <c:v>0.1631</c:v>
-                </c:pt>
-                <c:pt idx="156">
-                  <c:v>0.2104</c:v>
-                </c:pt>
-                <c:pt idx="157">
-                  <c:v>0.0152</c:v>
-                </c:pt>
-                <c:pt idx="158">
-                  <c:v>0.1055</c:v>
-                </c:pt>
-                <c:pt idx="159">
-                  <c:v>0.1818</c:v>
-                </c:pt>
-                <c:pt idx="160">
-                  <c:v>0.0651</c:v>
-                </c:pt>
-                <c:pt idx="161">
-                  <c:v>0.2927</c:v>
-                </c:pt>
-                <c:pt idx="162">
-                  <c:v>0.3085</c:v>
-                </c:pt>
-                <c:pt idx="163">
-                  <c:v>0.2489</c:v>
-                </c:pt>
-                <c:pt idx="164">
-                  <c:v>0.1088</c:v>
-                </c:pt>
-                <c:pt idx="165">
-                  <c:v>0.1727</c:v>
-                </c:pt>
-                <c:pt idx="166">
-                  <c:v>0.0393</c:v>
-                </c:pt>
-                <c:pt idx="167">
-                  <c:v>0.1722</c:v>
-                </c:pt>
-                <c:pt idx="168">
-                  <c:v>0.0424</c:v>
-                </c:pt>
-                <c:pt idx="169">
-                  <c:v>0.1216</c:v>
-                </c:pt>
-                <c:pt idx="170">
-                  <c:v>0.2328</c:v>
-                </c:pt>
-                <c:pt idx="171">
-                  <c:v>0.0971</c:v>
-                </c:pt>
-                <c:pt idx="172">
-                  <c:v>0.2835</c:v>
-                </c:pt>
-                <c:pt idx="173">
-                  <c:v>0.0352</c:v>
-                </c:pt>
-                <c:pt idx="174">
-                  <c:v>0.232</c:v>
-                </c:pt>
-                <c:pt idx="175">
-                  <c:v>0.0844</c:v>
-                </c:pt>
-                <c:pt idx="176">
-                  <c:v>0.3626</c:v>
-                </c:pt>
-                <c:pt idx="177">
-                  <c:v>0.0703</c:v>
-                </c:pt>
-                <c:pt idx="178">
-                  <c:v>0.2648</c:v>
-                </c:pt>
-                <c:pt idx="179">
-                  <c:v>0.3043</c:v>
-                </c:pt>
-                <c:pt idx="180">
-                  <c:v>0.2182</c:v>
-                </c:pt>
-                <c:pt idx="181">
-                  <c:v>0.0262</c:v>
-                </c:pt>
-                <c:pt idx="182">
-                  <c:v>0.1298</c:v>
-                </c:pt>
-                <c:pt idx="183">
-                  <c:v>0.0746</c:v>
-                </c:pt>
-                <c:pt idx="184">
-                  <c:v>0.1913</c:v>
-                </c:pt>
-                <c:pt idx="185">
-                  <c:v>0.0567</c:v>
-                </c:pt>
-                <c:pt idx="186">
-                  <c:v>0.0625</c:v>
-                </c:pt>
-                <c:pt idx="187">
-                  <c:v>0.3654</c:v>
-                </c:pt>
-                <c:pt idx="188">
-                  <c:v>0.1511</c:v>
-                </c:pt>
-                <c:pt idx="189">
-                  <c:v>0.0185</c:v>
-                </c:pt>
-                <c:pt idx="190">
-                  <c:v>0.2503</c:v>
-                </c:pt>
-                <c:pt idx="191">
-                  <c:v>0.077</c:v>
-                </c:pt>
-                <c:pt idx="192">
-                  <c:v>0.1691</c:v>
-                </c:pt>
-                <c:pt idx="193">
-                  <c:v>0.0579</c:v>
-                </c:pt>
-                <c:pt idx="194">
-                  <c:v>0.1881</c:v>
-                </c:pt>
-                <c:pt idx="195">
-                  <c:v>0.0501</c:v>
-                </c:pt>
-                <c:pt idx="196">
-                  <c:v>0.508</c:v>
-                </c:pt>
-                <c:pt idx="197">
-                  <c:v>0.1137</c:v>
-                </c:pt>
-                <c:pt idx="198">
-                  <c:v>0.2312</c:v>
-                </c:pt>
-                <c:pt idx="199">
-                  <c:v>0.3413</c:v>
-                </c:pt>
-                <c:pt idx="200">
-                  <c:v>0.0218</c:v>
-                </c:pt>
-                <c:pt idx="201">
-                  <c:v>0.0452</c:v>
-                </c:pt>
-                <c:pt idx="202">
-                  <c:v>0.0184</c:v>
-                </c:pt>
-                <c:pt idx="203">
-                  <c:v>0.084</c:v>
-                </c:pt>
-                <c:pt idx="204">
-                  <c:v>0.1042</c:v>
-                </c:pt>
-                <c:pt idx="205">
-                  <c:v>0.1273</c:v>
-                </c:pt>
-                <c:pt idx="206">
-                  <c:v>0.197</c:v>
-                </c:pt>
-                <c:pt idx="207">
-                  <c:v>0.2497</c:v>
-                </c:pt>
-                <c:pt idx="208">
-                  <c:v>0.0565</c:v>
-                </c:pt>
-                <c:pt idx="209">
-                  <c:v>0.0268</c:v>
-                </c:pt>
-                <c:pt idx="210">
-                  <c:v>0.0671</c:v>
-                </c:pt>
-                <c:pt idx="211">
-                  <c:v>0.1714</c:v>
-                </c:pt>
-                <c:pt idx="212">
-                  <c:v>0.2522</c:v>
-                </c:pt>
-                <c:pt idx="213">
-                  <c:v>0.2507</c:v>
-                </c:pt>
-                <c:pt idx="214">
-                  <c:v>0.2202</c:v>
-                </c:pt>
-                <c:pt idx="215">
-                  <c:v>0.1245</c:v>
-                </c:pt>
-                <c:pt idx="216">
-                  <c:v>0.1318</c:v>
-                </c:pt>
-                <c:pt idx="217">
-                  <c:v>0.3354</c:v>
-                </c:pt>
-                <c:pt idx="218">
-                  <c:v>0.1164</c:v>
-                </c:pt>
-                <c:pt idx="219">
-                  <c:v>0.2576</c:v>
-                </c:pt>
-                <c:pt idx="220">
-                  <c:v>0.0359</c:v>
-                </c:pt>
-                <c:pt idx="221">
-                  <c:v>0.0872</c:v>
-                </c:pt>
-                <c:pt idx="222">
-                  <c:v>0.0238</c:v>
-                </c:pt>
-                <c:pt idx="223">
-                  <c:v>0.0322</c:v>
-                </c:pt>
-                <c:pt idx="224">
-                  <c:v>0.0868</c:v>
-                </c:pt>
-                <c:pt idx="225">
-                  <c:v>0.097</c:v>
-                </c:pt>
-                <c:pt idx="226">
-                  <c:v>0.0595</c:v>
-                </c:pt>
-                <c:pt idx="227">
-                  <c:v>0.0961</c:v>
-                </c:pt>
-                <c:pt idx="228">
-                  <c:v>0.2219</c:v>
-                </c:pt>
-                <c:pt idx="229">
-                  <c:v>0.0369</c:v>
-                </c:pt>
-                <c:pt idx="230">
-                  <c:v>0.3611</c:v>
-                </c:pt>
-                <c:pt idx="231">
-                  <c:v>0.0651</c:v>
-                </c:pt>
-                <c:pt idx="232">
-                  <c:v>0.2375</c:v>
-                </c:pt>
-                <c:pt idx="233">
-                  <c:v>0.1715</c:v>
-                </c:pt>
-                <c:pt idx="234">
-                  <c:v>0.3107</c:v>
-                </c:pt>
-                <c:pt idx="235">
-                  <c:v>0.0206</c:v>
-                </c:pt>
                 <c:pt idx="236">
-                  <c:v>0.1788</c:v>
+                  <c:v>0.5719</c:v>
                 </c:pt>
                 <c:pt idx="237">
-                  <c:v>0.2268</c:v>
+                  <c:v>0.2036</c:v>
                 </c:pt>
                 <c:pt idx="238">
-                  <c:v>0.2316</c:v>
+                  <c:v>0.1872</c:v>
                 </c:pt>
                 <c:pt idx="239">
-                  <c:v>0.2602</c:v>
+                  <c:v>0.5504</c:v>
                 </c:pt>
                 <c:pt idx="240">
-                  <c:v>0.201</c:v>
+                  <c:v>0.6039</c:v>
                 </c:pt>
                 <c:pt idx="241">
-                  <c:v>0.2181</c:v>
+                  <c:v>0.5241</c:v>
                 </c:pt>
                 <c:pt idx="242">
-                  <c:v>0.0974</c:v>
+                  <c:v>0.3621</c:v>
                 </c:pt>
                 <c:pt idx="243">
-                  <c:v>0.0953</c:v>
+                  <c:v>0.5104</c:v>
                 </c:pt>
                 <c:pt idx="244">
-                  <c:v>0.2479</c:v>
+                  <c:v>0.4421</c:v>
                 </c:pt>
                 <c:pt idx="245">
-                  <c:v>0.2038</c:v>
+                  <c:v>0.5595</c:v>
                 </c:pt>
                 <c:pt idx="246">
-                  <c:v>0.1136</c:v>
+                  <c:v>0.3172</c:v>
                 </c:pt>
                 <c:pt idx="247">
-                  <c:v>0.0575</c:v>
+                  <c:v>0.3814</c:v>
                 </c:pt>
                 <c:pt idx="248">
-                  <c:v>0.1855</c:v>
+                  <c:v>0.4367</c:v>
                 </c:pt>
                 <c:pt idx="249">
-                  <c:v>0.2415</c:v>
+                  <c:v>0.2684</c:v>
                 </c:pt>
               </c:numCache>
             </c:numRef>
@@ -1716,754 +1716,754 @@
                 <c:formatCode>General</c:formatCode>
                 <c:ptCount val="250"/>
                 <c:pt idx="0">
-                  <c:v>0.0611</c:v>
+                  <c:v>0.741</c:v>
                 </c:pt>
                 <c:pt idx="1">
-                  <c:v>0.1215</c:v>
+                  <c:v>0.4429</c:v>
                 </c:pt>
                 <c:pt idx="2">
-                  <c:v>0.1037</c:v>
+                  <c:v>0.6139</c:v>
                 </c:pt>
                 <c:pt idx="3">
-                  <c:v>0.136</c:v>
+                  <c:v>0.7362</c:v>
                 </c:pt>
                 <c:pt idx="4">
-                  <c:v>0.0601</c:v>
+                  <c:v>0.4278</c:v>
                 </c:pt>
                 <c:pt idx="5">
-                  <c:v>0.3317</c:v>
+                  <c:v>0.818</c:v>
                 </c:pt>
                 <c:pt idx="6">
-                  <c:v>0.0281</c:v>
+                  <c:v>0.4565</c:v>
                 </c:pt>
                 <c:pt idx="7">
-                  <c:v>0.0883</c:v>
+                  <c:v>0.6586</c:v>
                 </c:pt>
                 <c:pt idx="8">
-                  <c:v>0.0746</c:v>
+                  <c:v>0.6445</c:v>
                 </c:pt>
                 <c:pt idx="9">
-                  <c:v>0.1075</c:v>
+                  <c:v>0.736</c:v>
                 </c:pt>
                 <c:pt idx="10">
-                  <c:v>0.0349</c:v>
+                  <c:v>0.224</c:v>
                 </c:pt>
                 <c:pt idx="11">
-                  <c:v>0.1173</c:v>
+                  <c:v>0.8175</c:v>
                 </c:pt>
                 <c:pt idx="12">
-                  <c:v>0.0719</c:v>
+                  <c:v>0.5061</c:v>
                 </c:pt>
                 <c:pt idx="13">
-                  <c:v>0.0704</c:v>
+                  <c:v>0.4214</c:v>
                 </c:pt>
                 <c:pt idx="14">
-                  <c:v>0.0539</c:v>
+                  <c:v>0.5127</c:v>
                 </c:pt>
                 <c:pt idx="15">
-                  <c:v>0.0773</c:v>
+                  <c:v>0.4951</c:v>
                 </c:pt>
                 <c:pt idx="16">
-                  <c:v>0.0986</c:v>
+                  <c:v>0.4643</c:v>
                 </c:pt>
                 <c:pt idx="17">
-                  <c:v>0.0353</c:v>
+                  <c:v>0.1858</c:v>
                 </c:pt>
                 <c:pt idx="18">
-                  <c:v>0.094</c:v>
+                  <c:v>0.6668</c:v>
                 </c:pt>
                 <c:pt idx="19">
-                  <c:v>0.0382</c:v>
+                  <c:v>0.1759</c:v>
                 </c:pt>
                 <c:pt idx="20">
-                  <c:v>0.0778</c:v>
+                  <c:v>0.7299</c:v>
                 </c:pt>
                 <c:pt idx="21">
-                  <c:v>0.0327</c:v>
+                  <c:v>0.4802</c:v>
                 </c:pt>
                 <c:pt idx="22">
-                  <c:v>0.0454</c:v>
+                  <c:v>0.3805</c:v>
                 </c:pt>
                 <c:pt idx="23">
-                  <c:v>0.1844</c:v>
+                  <c:v>0.7642</c:v>
                 </c:pt>
                 <c:pt idx="24">
-                  <c:v>0.0206</c:v>
+                  <c:v>0.2716</c:v>
                 </c:pt>
                 <c:pt idx="25">
-                  <c:v>0.0789</c:v>
+                  <c:v>0.4979</c:v>
                 </c:pt>
                 <c:pt idx="26">
-                  <c:v>0.0738</c:v>
+                  <c:v>0.6756</c:v>
                 </c:pt>
                 <c:pt idx="27">
-                  <c:v>0.1866</c:v>
+                  <c:v>0.7996</c:v>
                 </c:pt>
                 <c:pt idx="28">
-                  <c:v>0.0651</c:v>
+                  <c:v>0.5719</c:v>
                 </c:pt>
                 <c:pt idx="29">
-                  <c:v>0.0962</c:v>
+                  <c:v>0.7412</c:v>
                 </c:pt>
                 <c:pt idx="30">
-                  <c:v>0.0706</c:v>
+                  <c:v>0.6663</c:v>
                 </c:pt>
                 <c:pt idx="31">
-                  <c:v>0.1047</c:v>
+                  <c:v>0.786</c:v>
                 </c:pt>
                 <c:pt idx="32">
-                  <c:v>0.0793</c:v>
+                  <c:v>0.4308</c:v>
                 </c:pt>
                 <c:pt idx="33">
-                  <c:v>0.051</c:v>
+                  <c:v>0.4958</c:v>
                 </c:pt>
                 <c:pt idx="34">
-                  <c:v>0.0986</c:v>
+                  <c:v>0.5737</c:v>
                 </c:pt>
                 <c:pt idx="35">
-                  <c:v>0.2554</c:v>
+                  <c:v>0.853</c:v>
                 </c:pt>
                 <c:pt idx="36">
-                  <c:v>0.0682</c:v>
+                  <c:v>0.4986</c:v>
                 </c:pt>
                 <c:pt idx="37">
-                  <c:v>0.0577</c:v>
+                  <c:v>0.6051</c:v>
                 </c:pt>
                 <c:pt idx="38">
-                  <c:v>0.1377</c:v>
+                  <c:v>0.8097</c:v>
                 </c:pt>
                 <c:pt idx="39">
-                  <c:v>0.1483</c:v>
+                  <c:v>0.8939</c:v>
                 </c:pt>
                 <c:pt idx="40">
-                  <c:v>0.0373</c:v>
+                  <c:v>0.7895</c:v>
                 </c:pt>
                 <c:pt idx="41">
-                  <c:v>0.0419</c:v>
+                  <c:v>0.3421</c:v>
                 </c:pt>
                 <c:pt idx="42">
-                  <c:v>0.0821</c:v>
+                  <c:v>0.4415</c:v>
                 </c:pt>
                 <c:pt idx="43">
-                  <c:v>0.0248</c:v>
+                  <c:v>0.4093</c:v>
                 </c:pt>
                 <c:pt idx="44">
-                  <c:v>0.0588</c:v>
+                  <c:v>0.5811</c:v>
                 </c:pt>
                 <c:pt idx="45">
-                  <c:v>0.0043</c:v>
+                  <c:v>0.4397</c:v>
                 </c:pt>
                 <c:pt idx="46">
-                  <c:v>0.0655</c:v>
+                  <c:v>0.4917</c:v>
                 </c:pt>
                 <c:pt idx="47">
-                  <c:v>0.0557</c:v>
+                  <c:v>0.4988</c:v>
                 </c:pt>
                 <c:pt idx="48">
-                  <c:v>0.019</c:v>
+                  <c:v>0.2181</c:v>
                 </c:pt>
                 <c:pt idx="49">
-                  <c:v>0.0585</c:v>
+                  <c:v>0.627</c:v>
                 </c:pt>
                 <c:pt idx="50">
-                  <c:v>0.0815</c:v>
+                  <c:v>0.4755</c:v>
                 </c:pt>
                 <c:pt idx="51">
-                  <c:v>0.0704</c:v>
+                  <c:v>0.6374</c:v>
                 </c:pt>
                 <c:pt idx="52">
-                  <c:v>0.061</c:v>
+                  <c:v>0.3283</c:v>
                 </c:pt>
                 <c:pt idx="53">
-                  <c:v>0.0397</c:v>
+                  <c:v>0.4787</c:v>
                 </c:pt>
                 <c:pt idx="54">
-                  <c:v>0.1147</c:v>
+                  <c:v>0.6667</c:v>
                 </c:pt>
                 <c:pt idx="55">
-                  <c:v>0.0272</c:v>
+                  <c:v>0.3837</c:v>
                 </c:pt>
                 <c:pt idx="56">
-                  <c:v>0.0611</c:v>
+                  <c:v>0.6578</c:v>
                 </c:pt>
                 <c:pt idx="57">
-                  <c:v>0.0507</c:v>
+                  <c:v>0.4656</c:v>
                 </c:pt>
                 <c:pt idx="58">
-                  <c:v>0.15</c:v>
+                  <c:v>0.54</c:v>
                 </c:pt>
                 <c:pt idx="59">
-                  <c:v>0.0428</c:v>
+                  <c:v>0.5139</c:v>
                 </c:pt>
                 <c:pt idx="60">
-                  <c:v>0.0721</c:v>
+                  <c:v>0.6735</c:v>
                 </c:pt>
                 <c:pt idx="61">
-                  <c:v>0.085</c:v>
+                  <c:v>0.5811</c:v>
                 </c:pt>
                 <c:pt idx="62">
-                  <c:v>0.0443</c:v>
+                  <c:v>0.4436</c:v>
                 </c:pt>
                 <c:pt idx="63">
-                  <c:v>0.0835</c:v>
+                  <c:v>0.5909</c:v>
                 </c:pt>
                 <c:pt idx="64">
-                  <c:v>0.0413</c:v>
+                  <c:v>0.3931</c:v>
                 </c:pt>
                 <c:pt idx="65">
-                  <c:v>0.0395</c:v>
+                  <c:v>0.6004</c:v>
                 </c:pt>
                 <c:pt idx="66">
-                  <c:v>0.1121</c:v>
+                  <c:v>0.8221</c:v>
                 </c:pt>
                 <c:pt idx="67">
-                  <c:v>0.064</c:v>
+                  <c:v>0.4943</c:v>
                 </c:pt>
                 <c:pt idx="68">
-                  <c:v>0.0756</c:v>
+                  <c:v>0.5153</c:v>
                 </c:pt>
                 <c:pt idx="69">
-                  <c:v>0.0947</c:v>
+                  <c:v>0.7278</c:v>
                 </c:pt>
                 <c:pt idx="70">
-                  <c:v>0.0765</c:v>
+                  <c:v>0.4736</c:v>
                 </c:pt>
                 <c:pt idx="71">
-                  <c:v>0.056</c:v>
+                  <c:v>0.3792</c:v>
                 </c:pt>
                 <c:pt idx="72">
-                  <c:v>0.0465</c:v>
+                  <c:v>0.5308</c:v>
                 </c:pt>
                 <c:pt idx="73">
-                  <c:v>0.1531</c:v>
+                  <c:v>0.5479</c:v>
                 </c:pt>
                 <c:pt idx="74">
-                  <c:v>0.0784</c:v>
+                  <c:v>0.2747</c:v>
                 </c:pt>
                 <c:pt idx="75">
-                  <c:v>0.0554</c:v>
+                  <c:v>0.3295</c:v>
                 </c:pt>
                 <c:pt idx="76">
-                  <c:v>0.099</c:v>
+                  <c:v>0.7408</c:v>
                 </c:pt>
                 <c:pt idx="77">
-                  <c:v>0.1154</c:v>
+                  <c:v>0.7813</c:v>
                 </c:pt>
                 <c:pt idx="78">
-                  <c:v>0.0429</c:v>
+                  <c:v>0.4347</c:v>
                 </c:pt>
                 <c:pt idx="79">
-                  <c:v>0.1178</c:v>
+                  <c:v>0.6309</c:v>
                 </c:pt>
                 <c:pt idx="80">
-                  <c:v>0.0581</c:v>
+                  <c:v>0.4615</c:v>
                 </c:pt>
                 <c:pt idx="81">
-                  <c:v>0.0656</c:v>
+                  <c:v>0.5906</c:v>
                 </c:pt>
                 <c:pt idx="82">
-                  <c:v>0.0782</c:v>
+                  <c:v>0.6411</c:v>
                 </c:pt>
                 <c:pt idx="83">
-                  <c:v>0.1841</c:v>
+                  <c:v>0.7107</c:v>
                 </c:pt>
                 <c:pt idx="84">
-                  <c:v>0.101</c:v>
+                  <c:v>0.6567</c:v>
                 </c:pt>
                 <c:pt idx="85">
-                  <c:v>0.0446</c:v>
+                  <c:v>0.2787</c:v>
                 </c:pt>
                 <c:pt idx="86">
-                  <c:v>0.1417</c:v>
+                  <c:v>0.6939</c:v>
                 </c:pt>
                 <c:pt idx="87">
-                  <c:v>0.1409</c:v>
+                  <c:v>0.6861</c:v>
                 </c:pt>
                 <c:pt idx="88">
-                  <c:v>0.0402</c:v>
+                  <c:v>0.2366</c:v>
                 </c:pt>
                 <c:pt idx="89">
-                  <c:v>0.1002</c:v>
+                  <c:v>0.5854</c:v>
                 </c:pt>
                 <c:pt idx="90">
-                  <c:v>0.0202</c:v>
+                  <c:v>0.2719</c:v>
                 </c:pt>
                 <c:pt idx="91">
-                  <c:v>0.2102</c:v>
+                  <c:v>0.6917</c:v>
                 </c:pt>
                 <c:pt idx="92">
-                  <c:v>0.0635</c:v>
+                  <c:v>0.6178</c:v>
                 </c:pt>
                 <c:pt idx="93">
-                  <c:v>0.1106</c:v>
+                  <c:v>0.5878</c:v>
                 </c:pt>
                 <c:pt idx="94">
-                  <c:v>0.1001</c:v>
+                  <c:v>0.7203</c:v>
                 </c:pt>
                 <c:pt idx="95">
-                  <c:v>0.0365</c:v>
+                  <c:v>0.4404</c:v>
                 </c:pt>
                 <c:pt idx="96">
-                  <c:v>0.0587</c:v>
+                  <c:v>0.3265</c:v>
                 </c:pt>
                 <c:pt idx="97">
-                  <c:v>0.2334</c:v>
+                  <c:v>0.6935</c:v>
                 </c:pt>
                 <c:pt idx="98">
-                  <c:v>0.1004</c:v>
+                  <c:v>0.6908</c:v>
                 </c:pt>
                 <c:pt idx="99">
-                  <c:v>0.1706</c:v>
+                  <c:v>0.7815</c:v>
                 </c:pt>
                 <c:pt idx="100">
-                  <c:v>0.0777</c:v>
+                  <c:v>0.5913</c:v>
                 </c:pt>
                 <c:pt idx="101">
-                  <c:v>0.0436</c:v>
+                  <c:v>0.3319</c:v>
                 </c:pt>
                 <c:pt idx="102">
-                  <c:v>0.0571</c:v>
+                  <c:v>0.5593</c:v>
                 </c:pt>
                 <c:pt idx="103">
-                  <c:v>0.0652</c:v>
+                  <c:v>0.4083</c:v>
                 </c:pt>
                 <c:pt idx="104">
-                  <c:v>0.0657</c:v>
+                  <c:v>0.1268</c:v>
                 </c:pt>
                 <c:pt idx="105">
-                  <c:v>0.2659</c:v>
+                  <c:v>0.7042</c:v>
                 </c:pt>
                 <c:pt idx="106">
-                  <c:v>0.1809</c:v>
+                  <c:v>0.8174</c:v>
                 </c:pt>
                 <c:pt idx="107">
-                  <c:v>0.0588</c:v>
+                  <c:v>0.4892</c:v>
                 </c:pt>
                 <c:pt idx="108">
-                  <c:v>0.0634</c:v>
+                  <c:v>0.4773</c:v>
                 </c:pt>
                 <c:pt idx="109">
-                  <c:v>0.0759</c:v>
+                  <c:v>0.5119</c:v>
                 </c:pt>
                 <c:pt idx="110">
-                  <c:v>0.0576</c:v>
+                  <c:v>0.4241</c:v>
                 </c:pt>
                 <c:pt idx="111">
-                  <c:v>0.1418</c:v>
+                  <c:v>0.7515</c:v>
                 </c:pt>
                 <c:pt idx="112">
-                  <c:v>0.1263</c:v>
+                  <c:v>0.7997</c:v>
                 </c:pt>
                 <c:pt idx="113">
-                  <c:v>0.0311</c:v>
+                  <c:v>0.3512</c:v>
                 </c:pt>
                 <c:pt idx="114">
-                  <c:v>0.167</c:v>
+                  <c:v>0.8147</c:v>
                 </c:pt>
                 <c:pt idx="115">
-                  <c:v>0.0099</c:v>
+                  <c:v>0.1794</c:v>
                 </c:pt>
                 <c:pt idx="116">
-                  <c:v>0.0726</c:v>
+                  <c:v>0.627</c:v>
                 </c:pt>
                 <c:pt idx="117">
-                  <c:v>0.1386</c:v>
+                  <c:v>0.6618</c:v>
                 </c:pt>
                 <c:pt idx="118">
-                  <c:v>0.0536</c:v>
+                  <c:v>0.5348</c:v>
                 </c:pt>
                 <c:pt idx="119">
-                  <c:v>0.0806</c:v>
+                  <c:v>0.7297</c:v>
                 </c:pt>
                 <c:pt idx="120">
-                  <c:v>0.0318</c:v>
+                  <c:v>0.3076</c:v>
                 </c:pt>
                 <c:pt idx="121">
-                  <c:v>0.1081</c:v>
+                  <c:v>0.8092</c:v>
                 </c:pt>
                 <c:pt idx="122">
-                  <c:v>0.0553</c:v>
+                  <c:v>0.253</c:v>
                 </c:pt>
                 <c:pt idx="123">
-                  <c:v>0.1159</c:v>
+                  <c:v>0.7318</c:v>
                 </c:pt>
                 <c:pt idx="124">
-                  <c:v>0.1491</c:v>
+                  <c:v>0.5748</c:v>
                 </c:pt>
                 <c:pt idx="125">
-                  <c:v>0.0578</c:v>
+                  <c:v>0.1738</c:v>
                 </c:pt>
                 <c:pt idx="126">
-                  <c:v>0.0795</c:v>
+                  <c:v>0.7651</c:v>
                 </c:pt>
                 <c:pt idx="127">
-                  <c:v>0.1229</c:v>
+                  <c:v>0.451</c:v>
                 </c:pt>
                 <c:pt idx="128">
-                  <c:v>0.0738</c:v>
+                  <c:v>0.204</c:v>
                 </c:pt>
                 <c:pt idx="129">
-                  <c:v>0.3144</c:v>
+                  <c:v>0.8464</c:v>
                 </c:pt>
                 <c:pt idx="130">
-                  <c:v>0.0642</c:v>
+                  <c:v>0.4699</c:v>
                 </c:pt>
                 <c:pt idx="131">
-                  <c:v>0.064</c:v>
+                  <c:v>0.6531</c:v>
                 </c:pt>
                 <c:pt idx="132">
-                  <c:v>0.0949</c:v>
+                  <c:v>0.5685</c:v>
                 </c:pt>
                 <c:pt idx="133">
-                  <c:v>0.0339</c:v>
+                  <c:v>0.1163</c:v>
                 </c:pt>
                 <c:pt idx="134">
-                  <c:v>0.0752</c:v>
+                  <c:v>0.5041</c:v>
                 </c:pt>
                 <c:pt idx="135">
-                  <c:v>0.07</c:v>
+                  <c:v>0.6396</c:v>
                 </c:pt>
                 <c:pt idx="136">
-                  <c:v>0.0939</c:v>
+                  <c:v>0.6547</c:v>
                 </c:pt>
                 <c:pt idx="137">
-                  <c:v>0.0662</c:v>
+                  <c:v>0.7442</c:v>
                 </c:pt>
                 <c:pt idx="138">
-                  <c:v>0.1216</c:v>
+                  <c:v>0.7699</c:v>
                 </c:pt>
                 <c:pt idx="139">
-                  <c:v>0.0447</c:v>
+                  <c:v>0.3708</c:v>
                 </c:pt>
                 <c:pt idx="140">
-                  <c:v>0.1131</c:v>
+                  <c:v>0.7876</c:v>
                 </c:pt>
                 <c:pt idx="141">
-                  <c:v>0.256</c:v>
+                  <c:v>0.2649</c:v>
                 </c:pt>
                 <c:pt idx="142">
-                  <c:v>0.0181</c:v>
+                  <c:v>0.3225</c:v>
                 </c:pt>
                 <c:pt idx="143">
-                  <c:v>0.0682</c:v>
+                  <c:v>0.1218</c:v>
                 </c:pt>
                 <c:pt idx="144">
-                  <c:v>0.0771</c:v>
+                  <c:v>0.2529</c:v>
                 </c:pt>
                 <c:pt idx="145">
-                  <c:v>0.1246</c:v>
+                  <c:v>0.8108</c:v>
                 </c:pt>
                 <c:pt idx="146">
-                  <c:v>0.0294</c:v>
+                  <c:v>0.2042</c:v>
                 </c:pt>
                 <c:pt idx="147">
-                  <c:v>0.0382</c:v>
+                  <c:v>0.4194</c:v>
                 </c:pt>
                 <c:pt idx="148">
-                  <c:v>0.0657</c:v>
+                  <c:v>0.6249</c:v>
                 </c:pt>
                 <c:pt idx="149">
-                  <c:v>0.0403</c:v>
+                  <c:v>0.4842</c:v>
                 </c:pt>
                 <c:pt idx="150">
-                  <c:v>0.073</c:v>
+                  <c:v>0.3544</c:v>
                 </c:pt>
                 <c:pt idx="151">
-                  <c:v>0.0822</c:v>
+                  <c:v>0.6636</c:v>
                 </c:pt>
                 <c:pt idx="152">
-                  <c:v>0.0601</c:v>
+                  <c:v>0.6049</c:v>
                 </c:pt>
                 <c:pt idx="153">
+                  <c:v>0.3422</c:v>
+                </c:pt>
+                <c:pt idx="154">
+                  <c:v>0.5552</c:v>
+                </c:pt>
+                <c:pt idx="155">
+                  <c:v>0.8026</c:v>
+                </c:pt>
+                <c:pt idx="156">
+                  <c:v>0.7772</c:v>
+                </c:pt>
+                <c:pt idx="157">
+                  <c:v>0.66</c:v>
+                </c:pt>
+                <c:pt idx="158">
+                  <c:v>0.1935</c:v>
+                </c:pt>
+                <c:pt idx="159">
+                  <c:v>0.6933</c:v>
+                </c:pt>
+                <c:pt idx="160">
+                  <c:v>0.6434</c:v>
+                </c:pt>
+                <c:pt idx="161">
+                  <c:v>0.6913</c:v>
+                </c:pt>
+                <c:pt idx="162">
+                  <c:v>0.4137</c:v>
+                </c:pt>
+                <c:pt idx="163">
+                  <c:v>0.7682</c:v>
+                </c:pt>
+                <c:pt idx="164">
+                  <c:v>0.702</c:v>
+                </c:pt>
+                <c:pt idx="165">
+                  <c:v>0.3752</c:v>
+                </c:pt>
+                <c:pt idx="166">
+                  <c:v>0.4347</c:v>
+                </c:pt>
+                <c:pt idx="167">
+                  <c:v>0.9065</c:v>
+                </c:pt>
+                <c:pt idx="168">
+                  <c:v>0.3556</c:v>
+                </c:pt>
+                <c:pt idx="169">
+                  <c:v>0.4121</c:v>
+                </c:pt>
+                <c:pt idx="170">
+                  <c:v>0.6094</c:v>
+                </c:pt>
+                <c:pt idx="171">
+                  <c:v>0.6785</c:v>
+                </c:pt>
+                <c:pt idx="172">
+                  <c:v>0.2865</c:v>
+                </c:pt>
+                <c:pt idx="173">
+                  <c:v>0.4664</c:v>
+                </c:pt>
+                <c:pt idx="174">
+                  <c:v>0.5749</c:v>
+                </c:pt>
+                <c:pt idx="175">
+                  <c:v>0.5314</c:v>
+                </c:pt>
+                <c:pt idx="176">
+                  <c:v>0.7246</c:v>
+                </c:pt>
+                <c:pt idx="177">
+                  <c:v>0.1238</c:v>
+                </c:pt>
+                <c:pt idx="178">
+                  <c:v>0.4881</c:v>
+                </c:pt>
+                <c:pt idx="179">
+                  <c:v>0.6377</c:v>
+                </c:pt>
+                <c:pt idx="180">
+                  <c:v>0.2192</c:v>
+                </c:pt>
+                <c:pt idx="181">
+                  <c:v>0.3511</c:v>
+                </c:pt>
+                <c:pt idx="182">
                   <c:v>0.0</c:v>
                 </c:pt>
-                <c:pt idx="154">
-                  <c:v>0.0613</c:v>
-                </c:pt>
-                <c:pt idx="155">
-                  <c:v>0.1558</c:v>
-                </c:pt>
-                <c:pt idx="156">
-                  <c:v>0.1486</c:v>
-                </c:pt>
-                <c:pt idx="157">
-                  <c:v>0.0756</c:v>
-                </c:pt>
-                <c:pt idx="158">
-                  <c:v>0.0718</c:v>
-                </c:pt>
-                <c:pt idx="159">
-                  <c:v>0.0971</c:v>
-                </c:pt>
-                <c:pt idx="160">
-                  <c:v>0.0466</c:v>
-                </c:pt>
-                <c:pt idx="161">
-                  <c:v>0.121</c:v>
-                </c:pt>
-                <c:pt idx="162">
-                  <c:v>0.0598</c:v>
-                </c:pt>
-                <c:pt idx="163">
-                  <c:v>0.1662</c:v>
-                </c:pt>
-                <c:pt idx="164">
-                  <c:v>0.1277</c:v>
-                </c:pt>
-                <c:pt idx="165">
-                  <c:v>0.0377</c:v>
-                </c:pt>
-                <c:pt idx="166">
-                  <c:v>0.0691</c:v>
-                </c:pt>
-                <c:pt idx="167">
-                  <c:v>0.779</c:v>
-                </c:pt>
-                <c:pt idx="168">
-                  <c:v>0.0558</c:v>
-                </c:pt>
-                <c:pt idx="169">
-                  <c:v>0.0532</c:v>
-                </c:pt>
-                <c:pt idx="170">
-                  <c:v>0.0593</c:v>
-                </c:pt>
-                <c:pt idx="171">
-                  <c:v>0.0471</c:v>
-                </c:pt>
-                <c:pt idx="172">
-                  <c:v>0.0484</c:v>
-                </c:pt>
-                <c:pt idx="173">
-                  <c:v>0.0429</c:v>
-                </c:pt>
-                <c:pt idx="174">
-                  <c:v>0.0546</c:v>
-                </c:pt>
-                <c:pt idx="175">
-                  <c:v>0.1131</c:v>
-                </c:pt>
-                <c:pt idx="176">
-                  <c:v>0.0824</c:v>
-                </c:pt>
-                <c:pt idx="177">
-                  <c:v>0.051</c:v>
-                </c:pt>
-                <c:pt idx="178">
-                  <c:v>0.0695</c:v>
-                </c:pt>
-                <c:pt idx="179">
-                  <c:v>0.0806</c:v>
-                </c:pt>
-                <c:pt idx="180">
-                  <c:v>0.0563</c:v>
-                </c:pt>
-                <c:pt idx="181">
-                  <c:v>0.0845</c:v>
-                </c:pt>
-                <c:pt idx="182">
-                  <c:v>0.016</c:v>
-                </c:pt>
                 <c:pt idx="183">
-                  <c:v>0.003</c:v>
+                  <c:v>0.417</c:v>
                 </c:pt>
                 <c:pt idx="184">
-                  <c:v>0.2202</c:v>
+                  <c:v>0.7612</c:v>
                 </c:pt>
                 <c:pt idx="185">
-                  <c:v>0.0381</c:v>
+                  <c:v>0.3504</c:v>
                 </c:pt>
                 <c:pt idx="186">
-                  <c:v>0.0961</c:v>
+                  <c:v>0.6288</c:v>
                 </c:pt>
                 <c:pt idx="187">
-                  <c:v>0.0616</c:v>
+                  <c:v>0.4769</c:v>
                 </c:pt>
                 <c:pt idx="188">
-                  <c:v>0.0582</c:v>
+                  <c:v>0.6353</c:v>
                 </c:pt>
                 <c:pt idx="189">
-                  <c:v>0.0989</c:v>
+                  <c:v>0.4443</c:v>
                 </c:pt>
                 <c:pt idx="190">
-                  <c:v>0.0606</c:v>
+                  <c:v>0.4437</c:v>
                 </c:pt>
                 <c:pt idx="191">
-                  <c:v>0.038</c:v>
+                  <c:v>0.3941</c:v>
                 </c:pt>
                 <c:pt idx="192">
-                  <c:v>0.0982</c:v>
+                  <c:v>0.6713</c:v>
                 </c:pt>
                 <c:pt idx="193">
-                  <c:v>0.176</c:v>
+                  <c:v>0.7367</c:v>
                 </c:pt>
                 <c:pt idx="194">
-                  <c:v>0.2731</c:v>
+                  <c:v>0.8321</c:v>
                 </c:pt>
                 <c:pt idx="195">
-                  <c:v>0.0164</c:v>
+                  <c:v>0.4237</c:v>
                 </c:pt>
                 <c:pt idx="196">
-                  <c:v>0.0445</c:v>
+                  <c:v>0.4191</c:v>
                 </c:pt>
                 <c:pt idx="197">
-                  <c:v>0.065</c:v>
+                  <c:v>0.5654</c:v>
                 </c:pt>
                 <c:pt idx="198">
-                  <c:v>0.0843</c:v>
+                  <c:v>0.4945</c:v>
                 </c:pt>
                 <c:pt idx="199">
-                  <c:v>0.0891</c:v>
+                  <c:v>0.7297</c:v>
                 </c:pt>
                 <c:pt idx="200">
-                  <c:v>0.196</c:v>
+                  <c:v>0.7825</c:v>
                 </c:pt>
                 <c:pt idx="201">
-                  <c:v>0.0299</c:v>
+                  <c:v>0.1842</c:v>
                 </c:pt>
                 <c:pt idx="202">
-                  <c:v>0.0731</c:v>
+                  <c:v>0.3434</c:v>
                 </c:pt>
                 <c:pt idx="203">
-                  <c:v>0.0787</c:v>
+                  <c:v>0.5767</c:v>
                 </c:pt>
                 <c:pt idx="204">
-                  <c:v>0.0727</c:v>
+                  <c:v>0.7439</c:v>
                 </c:pt>
                 <c:pt idx="205">
-                  <c:v>0.1335</c:v>
+                  <c:v>0.7295</c:v>
                 </c:pt>
                 <c:pt idx="206">
-                  <c:v>0.0635</c:v>
+                  <c:v>0.5879</c:v>
                 </c:pt>
                 <c:pt idx="207">
-                  <c:v>0.0775</c:v>
+                  <c:v>0.6554</c:v>
                 </c:pt>
                 <c:pt idx="208">
-                  <c:v>0.0701</c:v>
+                  <c:v>0.5356</c:v>
                 </c:pt>
                 <c:pt idx="209">
-                  <c:v>0.0815</c:v>
+                  <c:v>0.1896</c:v>
                 </c:pt>
                 <c:pt idx="210">
-                  <c:v>0.0875</c:v>
+                  <c:v>0.7726</c:v>
                 </c:pt>
                 <c:pt idx="211">
-                  <c:v>0.0804</c:v>
+                  <c:v>0.5545</c:v>
                 </c:pt>
                 <c:pt idx="212">
-                  <c:v>0.1129</c:v>
+                  <c:v>0.5026</c:v>
                 </c:pt>
                 <c:pt idx="213">
-                  <c:v>0.1156</c:v>
+                  <c:v>0.6943</c:v>
                 </c:pt>
                 <c:pt idx="214">
-                  <c:v>0.2737</c:v>
+                  <c:v>0.8587</c:v>
                 </c:pt>
                 <c:pt idx="215">
-                  <c:v>0.0657</c:v>
+                  <c:v>0.7449</c:v>
                 </c:pt>
                 <c:pt idx="216">
-                  <c:v>0.0905</c:v>
+                  <c:v>0.7886</c:v>
                 </c:pt>
                 <c:pt idx="217">
-                  <c:v>0.055</c:v>
+                  <c:v>0.4263</c:v>
                 </c:pt>
                 <c:pt idx="218">
-                  <c:v>0.5132</c:v>
+                  <c:v>0.7629</c:v>
                 </c:pt>
                 <c:pt idx="219">
-                  <c:v>0.0607</c:v>
+                  <c:v>0.5164</c:v>
                 </c:pt>
                 <c:pt idx="220">
-                  <c:v>0.0574</c:v>
+                  <c:v>0.4373</c:v>
                 </c:pt>
                 <c:pt idx="221">
-                  <c:v>0.2095</c:v>
+                  <c:v>0.697</c:v>
                 </c:pt>
                 <c:pt idx="222">
-                  <c:v>0.1064</c:v>
+                  <c:v>0.4143</c:v>
                 </c:pt>
                 <c:pt idx="223">
-                  <c:v>0.0655</c:v>
+                  <c:v>0.5838</c:v>
                 </c:pt>
                 <c:pt idx="224">
-                  <c:v>0.0823</c:v>
+                  <c:v>0.7147</c:v>
                 </c:pt>
                 <c:pt idx="225">
-                  <c:v>0.0463</c:v>
+                  <c:v>0.4847</c:v>
                 </c:pt>
                 <c:pt idx="226">
-                  <c:v>0.1047</c:v>
+                  <c:v>0.7053</c:v>
                 </c:pt>
                 <c:pt idx="227">
-                  <c:v>0.1121</c:v>
+                  <c:v>0.5733</c:v>
                 </c:pt>
                 <c:pt idx="228">
-                  <c:v>0.0471</c:v>
+                  <c:v>0.2668</c:v>
                 </c:pt>
                 <c:pt idx="229">
-                  <c:v>0.1503</c:v>
+                  <c:v>0.9388</c:v>
                 </c:pt>
                 <c:pt idx="230">
-                  <c:v>0.0525</c:v>
+                  <c:v>0.0064</c:v>
                 </c:pt>
                 <c:pt idx="231">
-                  <c:v>0.0456</c:v>
+                  <c:v>0.581</c:v>
                 </c:pt>
                 <c:pt idx="232">
-                  <c:v>0.0975</c:v>
+                  <c:v>0.49</c:v>
                 </c:pt>
                 <c:pt idx="233">
-                  <c:v>0.0979</c:v>
+                  <c:v>0.7832</c:v>
                 </c:pt>
                 <c:pt idx="234">
-                  <c:v>0.0528</c:v>
+                  <c:v>0.2791</c:v>
                 </c:pt>
                 <c:pt idx="235">
-                  <c:v>0.0997</c:v>
+                  <c:v>0.6753</c:v>
                 </c:pt>
                 <c:pt idx="236">
-                  <c:v>0.0419</c:v>
+                  <c:v>0.5818</c:v>
                 </c:pt>
                 <c:pt idx="237">
-                  <c:v>0.1069</c:v>
+                  <c:v>0.71</c:v>
                 </c:pt>
                 <c:pt idx="238">
-                  <c:v>0.0636</c:v>
+                  <c:v>0.5295</c:v>
                 </c:pt>
                 <c:pt idx="239">
-                  <c:v>0.103</c:v>
+                  <c:v>0.761</c:v>
                 </c:pt>
                 <c:pt idx="240">
-                  <c:v>0.0299</c:v>
+                  <c:v>0.4848</c:v>
                 </c:pt>
                 <c:pt idx="241">
-                  <c:v>0.1054</c:v>
+                  <c:v>0.7373</c:v>
                 </c:pt>
                 <c:pt idx="242">
-                  <c:v>0.0338</c:v>
+                  <c:v>0.2581</c:v>
                 </c:pt>
                 <c:pt idx="243">
-                  <c:v>0.1009</c:v>
+                  <c:v>0.5529</c:v>
                 </c:pt>
                 <c:pt idx="244">
-                  <c:v>0.0763</c:v>
+                  <c:v>0.7039</c:v>
                 </c:pt>
                 <c:pt idx="245">
-                  <c:v>0.439</c:v>
+                  <c:v>0.6676</c:v>
                 </c:pt>
                 <c:pt idx="246">
-                  <c:v>0.1637</c:v>
+                  <c:v>0.8744</c:v>
                 </c:pt>
                 <c:pt idx="247">
-                  <c:v>0.0612</c:v>
+                  <c:v>0.3239</c:v>
                 </c:pt>
                 <c:pt idx="248">
-                  <c:v>0.1927</c:v>
+                  <c:v>0.8692</c:v>
                 </c:pt>
                 <c:pt idx="249">
-                  <c:v>0.0725</c:v>
+                  <c:v>0.3433</c:v>
                 </c:pt>
               </c:numCache>
             </c:numRef>
@@ -2475,754 +2475,754 @@
                 <c:formatCode>General</c:formatCode>
                 <c:ptCount val="250"/>
                 <c:pt idx="0">
-                  <c:v>0.2023</c:v>
+                  <c:v>0.2407</c:v>
                 </c:pt>
                 <c:pt idx="1">
-                  <c:v>0.0237</c:v>
+                  <c:v>0.5667</c:v>
                 </c:pt>
                 <c:pt idx="2">
-                  <c:v>0.0173</c:v>
+                  <c:v>0.2147</c:v>
                 </c:pt>
                 <c:pt idx="3">
-                  <c:v>0.0549</c:v>
+                  <c:v>0.2561</c:v>
                 </c:pt>
                 <c:pt idx="4">
-                  <c:v>0.2688</c:v>
+                  <c:v>0.4703</c:v>
                 </c:pt>
                 <c:pt idx="5">
-                  <c:v>0.0991</c:v>
+                  <c:v>0.5243</c:v>
                 </c:pt>
                 <c:pt idx="6">
-                  <c:v>0.516</c:v>
+                  <c:v>0.1879</c:v>
                 </c:pt>
                 <c:pt idx="7">
-                  <c:v>0.0812</c:v>
+                  <c:v>0.1338</c:v>
                 </c:pt>
                 <c:pt idx="8">
-                  <c:v>0.138</c:v>
+                  <c:v>0.233</c:v>
                 </c:pt>
                 <c:pt idx="9">
-                  <c:v>0.1682</c:v>
+                  <c:v>0.292</c:v>
                 </c:pt>
                 <c:pt idx="10">
-                  <c:v>0.5167</c:v>
+                  <c:v>0.6502</c:v>
                 </c:pt>
                 <c:pt idx="11">
-                  <c:v>0.0228</c:v>
+                  <c:v>0.3074</c:v>
                 </c:pt>
                 <c:pt idx="12">
-                  <c:v>0.1684</c:v>
+                  <c:v>0.2679</c:v>
                 </c:pt>
                 <c:pt idx="13">
-                  <c:v>0.3399</c:v>
+                  <c:v>0.4272</c:v>
                 </c:pt>
                 <c:pt idx="14">
-                  <c:v>0.2642</c:v>
+                  <c:v>0.1494</c:v>
                 </c:pt>
                 <c:pt idx="15">
-                  <c:v>0.1932</c:v>
+                  <c:v>0.367</c:v>
                 </c:pt>
                 <c:pt idx="16">
-                  <c:v>0.2974</c:v>
+                  <c:v>0.4264</c:v>
                 </c:pt>
                 <c:pt idx="17">
-                  <c:v>0.4554</c:v>
+                  <c:v>0.7248</c:v>
                 </c:pt>
                 <c:pt idx="18">
-                  <c:v>0.1158</c:v>
+                  <c:v>0.3776</c:v>
                 </c:pt>
                 <c:pt idx="19">
-                  <c:v>0.5038</c:v>
+                  <c:v>0.7765</c:v>
                 </c:pt>
                 <c:pt idx="20">
-                  <c:v>0.0579</c:v>
+                  <c:v>0.1891</c:v>
                 </c:pt>
                 <c:pt idx="21">
-                  <c:v>0.4086</c:v>
+                  <c:v>0.1068</c:v>
                 </c:pt>
                 <c:pt idx="22">
-                  <c:v>0.3445</c:v>
+                  <c:v>0.4727</c:v>
                 </c:pt>
                 <c:pt idx="23">
-                  <c:v>0.0224</c:v>
+                  <c:v>0.3034</c:v>
                 </c:pt>
                 <c:pt idx="24">
-                  <c:v>0.622</c:v>
+                  <c:v>0.5677</c:v>
                 </c:pt>
                 <c:pt idx="25">
-                  <c:v>0.0912</c:v>
+                  <c:v>0.1929</c:v>
                 </c:pt>
                 <c:pt idx="26">
-                  <c:v>0.1557</c:v>
+                  <c:v>0.2009</c:v>
                 </c:pt>
                 <c:pt idx="27">
-                  <c:v>0.0525</c:v>
+                  <c:v>0.2989</c:v>
                 </c:pt>
                 <c:pt idx="28">
-                  <c:v>0.2422</c:v>
+                  <c:v>0.3035</c:v>
                 </c:pt>
                 <c:pt idx="29">
-                  <c:v>0.0441</c:v>
+                  <c:v>0.2846</c:v>
                 </c:pt>
                 <c:pt idx="30">
-                  <c:v>0.1007</c:v>
+                  <c:v>0.2503</c:v>
                 </c:pt>
                 <c:pt idx="31">
-                  <c:v>0.0199</c:v>
+                  <c:v>0.3515</c:v>
                 </c:pt>
                 <c:pt idx="32">
-                  <c:v>0.1367</c:v>
+                  <c:v>0.3707</c:v>
                 </c:pt>
                 <c:pt idx="33">
-                  <c:v>0.3166</c:v>
+                  <c:v>0.2986</c:v>
                 </c:pt>
                 <c:pt idx="34">
-                  <c:v>0.0519</c:v>
+                  <c:v>0.0831</c:v>
                 </c:pt>
                 <c:pt idx="35">
-                  <c:v>0.0536</c:v>
+                  <c:v>0.3788</c:v>
                 </c:pt>
                 <c:pt idx="36">
-                  <c:v>0.1367</c:v>
+                  <c:v>0.2509</c:v>
                 </c:pt>
                 <c:pt idx="37">
-                  <c:v>0.3051</c:v>
+                  <c:v>0.3023</c:v>
                 </c:pt>
                 <c:pt idx="38">
-                  <c:v>0.0401</c:v>
+                  <c:v>0.3992</c:v>
                 </c:pt>
                 <c:pt idx="39">
-                  <c:v>0.0267</c:v>
+                  <c:v>0.4321</c:v>
                 </c:pt>
                 <c:pt idx="40">
-                  <c:v>0.5025</c:v>
+                  <c:v>0.5042</c:v>
                 </c:pt>
                 <c:pt idx="41">
-                  <c:v>0.437</c:v>
+                  <c:v>0.4055</c:v>
                 </c:pt>
                 <c:pt idx="42">
-                  <c:v>0.1191</c:v>
+                  <c:v>0.2916</c:v>
                 </c:pt>
                 <c:pt idx="43">
-                  <c:v>0.537</c:v>
+                  <c:v>0.3899</c:v>
                 </c:pt>
                 <c:pt idx="44">
-                  <c:v>0.2166</c:v>
+                  <c:v>0.1848</c:v>
                 </c:pt>
                 <c:pt idx="45">
-                  <c:v>0.7235</c:v>
+                  <c:v>0.1845</c:v>
                 </c:pt>
                 <c:pt idx="46">
-                  <c:v>0.2502</c:v>
+                  <c:v>0.14</c:v>
                 </c:pt>
                 <c:pt idx="47">
-                  <c:v>0.2814</c:v>
+                  <c:v>0.3297</c:v>
                 </c:pt>
                 <c:pt idx="48">
-                  <c:v>0.6617</c:v>
+                  <c:v>0.6798</c:v>
                 </c:pt>
                 <c:pt idx="49">
-                  <c:v>0.2866</c:v>
+                  <c:v>0.3043</c:v>
                 </c:pt>
                 <c:pt idx="50">
-                  <c:v>0.2863</c:v>
+                  <c:v>0.433</c:v>
                 </c:pt>
                 <c:pt idx="51">
-                  <c:v>0.1274</c:v>
+                  <c:v>0.2135</c:v>
                 </c:pt>
                 <c:pt idx="52">
+                  <c:v>0.5361</c:v>
+                </c:pt>
+                <c:pt idx="53">
+                  <c:v>0.0403</c:v>
+                </c:pt>
+                <c:pt idx="54">
+                  <c:v>0.4072</c:v>
+                </c:pt>
+                <c:pt idx="55">
+                  <c:v>0.4187</c:v>
+                </c:pt>
+                <c:pt idx="56">
+                  <c:v>0.238</c:v>
+                </c:pt>
+                <c:pt idx="57">
+                  <c:v>0.4451</c:v>
+                </c:pt>
+                <c:pt idx="58">
+                  <c:v>0.3433</c:v>
+                </c:pt>
+                <c:pt idx="59">
+                  <c:v>0.3555</c:v>
+                </c:pt>
+                <c:pt idx="60">
+                  <c:v>0.2425</c:v>
+                </c:pt>
+                <c:pt idx="61">
+                  <c:v>0.3379</c:v>
+                </c:pt>
+                <c:pt idx="62">
+                  <c:v>0.5349</c:v>
+                </c:pt>
+                <c:pt idx="63">
+                  <c:v>0.3222</c:v>
+                </c:pt>
+                <c:pt idx="64">
+                  <c:v>0.0542</c:v>
+                </c:pt>
+                <c:pt idx="65">
+                  <c:v>0.1735</c:v>
+                </c:pt>
+                <c:pt idx="66">
+                  <c:v>0.321</c:v>
+                </c:pt>
+                <c:pt idx="67">
+                  <c:v>0.1942</c:v>
+                </c:pt>
+                <c:pt idx="68">
+                  <c:v>0.4381</c:v>
+                </c:pt>
+                <c:pt idx="69">
+                  <c:v>0.2389</c:v>
+                </c:pt>
+                <c:pt idx="70">
+                  <c:v>0.2277</c:v>
+                </c:pt>
+                <c:pt idx="71">
+                  <c:v>0.4377</c:v>
+                </c:pt>
+                <c:pt idx="72">
+                  <c:v>0.3689</c:v>
+                </c:pt>
+                <c:pt idx="73">
+                  <c:v>0.3557</c:v>
+                </c:pt>
+                <c:pt idx="74">
+                  <c:v>0.6439</c:v>
+                </c:pt>
+                <c:pt idx="75">
+                  <c:v>0.006</c:v>
+                </c:pt>
+                <c:pt idx="76">
+                  <c:v>0.297</c:v>
+                </c:pt>
+                <c:pt idx="77">
+                  <c:v>0.3282</c:v>
+                </c:pt>
+                <c:pt idx="78">
+                  <c:v>0.444</c:v>
+                </c:pt>
+                <c:pt idx="79">
+                  <c:v>0.1787</c:v>
+                </c:pt>
+                <c:pt idx="80">
+                  <c:v>0.4774</c:v>
+                </c:pt>
+                <c:pt idx="81">
+                  <c:v>0.1227</c:v>
+                </c:pt>
+                <c:pt idx="82">
+                  <c:v>0.2503</c:v>
+                </c:pt>
+                <c:pt idx="83">
+                  <c:v>0.2739</c:v>
+                </c:pt>
+                <c:pt idx="84">
+                  <c:v>0.212</c:v>
+                </c:pt>
+                <c:pt idx="85">
+                  <c:v>0.6491</c:v>
+                </c:pt>
+                <c:pt idx="86">
+                  <c:v>0.2295</c:v>
+                </c:pt>
+                <c:pt idx="87">
+                  <c:v>0.3652</c:v>
+                </c:pt>
+                <c:pt idx="88">
+                  <c:v>0.5889</c:v>
+                </c:pt>
+                <c:pt idx="89">
+                  <c:v>0.4289</c:v>
+                </c:pt>
+                <c:pt idx="90">
+                  <c:v>0.585</c:v>
+                </c:pt>
+                <c:pt idx="91">
+                  <c:v>0.287</c:v>
+                </c:pt>
+                <c:pt idx="92">
+                  <c:v>0.3404</c:v>
+                </c:pt>
+                <c:pt idx="93">
+                  <c:v>0.4475</c:v>
+                </c:pt>
+                <c:pt idx="94">
+                  <c:v>0.3208</c:v>
+                </c:pt>
+                <c:pt idx="95">
+                  <c:v>0.1341</c:v>
+                </c:pt>
+                <c:pt idx="96">
+                  <c:v>0.5297</c:v>
+                </c:pt>
+                <c:pt idx="97">
+                  <c:v>0.3752</c:v>
+                </c:pt>
+                <c:pt idx="98">
+                  <c:v>0.243</c:v>
+                </c:pt>
+                <c:pt idx="99">
+                  <c:v>0.347</c:v>
+                </c:pt>
+                <c:pt idx="100">
+                  <c:v>0.1773</c:v>
+                </c:pt>
+                <c:pt idx="101">
+                  <c:v>0.5054</c:v>
+                </c:pt>
+                <c:pt idx="102">
+                  <c:v>0.2751</c:v>
+                </c:pt>
+                <c:pt idx="103">
+                  <c:v>0.478</c:v>
+                </c:pt>
+                <c:pt idx="104">
+                  <c:v>0.8359</c:v>
+                </c:pt>
+                <c:pt idx="105">
+                  <c:v>0.3239</c:v>
+                </c:pt>
+                <c:pt idx="106">
+                  <c:v>0.4677</c:v>
+                </c:pt>
+                <c:pt idx="107">
+                  <c:v>0.3829</c:v>
+                </c:pt>
+                <c:pt idx="108">
+                  <c:v>0.0767</c:v>
+                </c:pt>
+                <c:pt idx="109">
+                  <c:v>0.3712</c:v>
+                </c:pt>
+                <c:pt idx="110">
+                  <c:v>0.2871</c:v>
+                </c:pt>
+                <c:pt idx="111">
+                  <c:v>0.2665</c:v>
+                </c:pt>
+                <c:pt idx="112">
+                  <c:v>0.3465</c:v>
+                </c:pt>
+                <c:pt idx="113">
+                  <c:v>0.2519</c:v>
+                </c:pt>
+                <c:pt idx="114">
+                  <c:v>0.3521</c:v>
+                </c:pt>
+                <c:pt idx="115">
+                  <c:v>0.784</c:v>
+                </c:pt>
+                <c:pt idx="116">
+                  <c:v>0.4504</c:v>
+                </c:pt>
+                <c:pt idx="117">
+                  <c:v>0.3332</c:v>
+                </c:pt>
+                <c:pt idx="118">
+                  <c:v>0.0995</c:v>
+                </c:pt>
+                <c:pt idx="119">
+                  <c:v>0.3073</c:v>
+                </c:pt>
+                <c:pt idx="120">
+                  <c:v>0.5645</c:v>
+                </c:pt>
+                <c:pt idx="121">
+                  <c:v>0.3839</c:v>
+                </c:pt>
+                <c:pt idx="122">
+                  <c:v>0.6926</c:v>
+                </c:pt>
+                <c:pt idx="123">
+                  <c:v>0.2196</c:v>
+                </c:pt>
+                <c:pt idx="124">
+                  <c:v>0.4495</c:v>
+                </c:pt>
+                <c:pt idx="125">
+                  <c:v>0.7499</c:v>
+                </c:pt>
+                <c:pt idx="126">
+                  <c:v>0.3286</c:v>
+                </c:pt>
+                <c:pt idx="127">
+                  <c:v>0.4537</c:v>
+                </c:pt>
+                <c:pt idx="128">
+                  <c:v>0.753</c:v>
+                </c:pt>
+                <c:pt idx="129">
+                  <c:v>0.3941</c:v>
+                </c:pt>
+                <c:pt idx="130">
+                  <c:v>0.265</c:v>
+                </c:pt>
+                <c:pt idx="131">
+                  <c:v>0.1875</c:v>
+                </c:pt>
+                <c:pt idx="132">
+                  <c:v>0.3933</c:v>
+                </c:pt>
+                <c:pt idx="133">
+                  <c:v>0.8007</c:v>
+                </c:pt>
+                <c:pt idx="134">
+                  <c:v>0.0798</c:v>
+                </c:pt>
+                <c:pt idx="135">
+                  <c:v>0.317</c:v>
+                </c:pt>
+                <c:pt idx="136">
+                  <c:v>0.3206</c:v>
+                </c:pt>
+                <c:pt idx="137">
+                  <c:v>0.3021</c:v>
+                </c:pt>
+                <c:pt idx="138">
+                  <c:v>0.3772</c:v>
+                </c:pt>
+                <c:pt idx="139">
+                  <c:v>0.2202</c:v>
+                </c:pt>
+                <c:pt idx="140">
+                  <c:v>0.2701</c:v>
+                </c:pt>
+                <c:pt idx="141">
+                  <c:v>0.6653</c:v>
+                </c:pt>
+                <c:pt idx="142">
+                  <c:v>0.6168</c:v>
+                </c:pt>
+                <c:pt idx="143">
+                  <c:v>0.7942</c:v>
+                </c:pt>
+                <c:pt idx="144">
+                  <c:v>0.5608</c:v>
+                </c:pt>
+                <c:pt idx="145">
+                  <c:v>0.3496</c:v>
+                </c:pt>
+                <c:pt idx="146">
+                  <c:v>0.6075</c:v>
+                </c:pt>
+                <c:pt idx="147">
+                  <c:v>0.4183</c:v>
+                </c:pt>
+                <c:pt idx="148">
+                  <c:v>0.2357</c:v>
+                </c:pt>
+                <c:pt idx="149">
+                  <c:v>0.0343</c:v>
+                </c:pt>
+                <c:pt idx="150">
+                  <c:v>0.0</c:v>
+                </c:pt>
+                <c:pt idx="151">
+                  <c:v>0.5115</c:v>
+                </c:pt>
+                <c:pt idx="152">
+                  <c:v>0.2133</c:v>
+                </c:pt>
+                <c:pt idx="153">
+                  <c:v>0.2337</c:v>
+                </c:pt>
+                <c:pt idx="154">
+                  <c:v>0.1174</c:v>
+                </c:pt>
+                <c:pt idx="155">
+                  <c:v>0.3187</c:v>
+                </c:pt>
+                <c:pt idx="156">
+                  <c:v>0.292</c:v>
+                </c:pt>
+                <c:pt idx="157">
+                  <c:v>0.1337</c:v>
+                </c:pt>
+                <c:pt idx="158">
+                  <c:v>0.663</c:v>
+                </c:pt>
+                <c:pt idx="159">
+                  <c:v>0.349</c:v>
+                </c:pt>
+                <c:pt idx="160">
+                  <c:v>0.2644</c:v>
+                </c:pt>
+                <c:pt idx="161">
+                  <c:v>0.2272</c:v>
+                </c:pt>
+                <c:pt idx="162">
+                  <c:v>0.5106</c:v>
+                </c:pt>
+                <c:pt idx="163">
                   <c:v>0.3253</c:v>
                 </c:pt>
-                <c:pt idx="53">
+                <c:pt idx="164">
+                  <c:v>0.2526</c:v>
+                </c:pt>
+                <c:pt idx="165">
+                  <c:v>0.5427</c:v>
+                </c:pt>
+                <c:pt idx="166">
+                  <c:v>0.5506</c:v>
+                </c:pt>
+                <c:pt idx="167">
+                  <c:v>0.5438</c:v>
+                </c:pt>
+                <c:pt idx="168">
+                  <c:v>0.2741</c:v>
+                </c:pt>
+                <c:pt idx="169">
+                  <c:v>0.489</c:v>
+                </c:pt>
+                <c:pt idx="170">
+                  <c:v>0.2096</c:v>
+                </c:pt>
+                <c:pt idx="171">
+                  <c:v>0.2903</c:v>
+                </c:pt>
+                <c:pt idx="172">
+                  <c:v>0.4365</c:v>
+                </c:pt>
+                <c:pt idx="173">
+                  <c:v>0.3438</c:v>
+                </c:pt>
+                <c:pt idx="174">
+                  <c:v>0.2721</c:v>
+                </c:pt>
+                <c:pt idx="175">
+                  <c:v>0.3704</c:v>
+                </c:pt>
+                <c:pt idx="176">
+                  <c:v>0.2429</c:v>
+                </c:pt>
+                <c:pt idx="177">
+                  <c:v>0.8441</c:v>
+                </c:pt>
+                <c:pt idx="178">
+                  <c:v>0.3791</c:v>
+                </c:pt>
+                <c:pt idx="179">
+                  <c:v>0.2345</c:v>
+                </c:pt>
+                <c:pt idx="180">
+                  <c:v>0.3005</c:v>
+                </c:pt>
+                <c:pt idx="181">
+                  <c:v>0.3311</c:v>
+                </c:pt>
+                <c:pt idx="182">
+                  <c:v>1.0</c:v>
+                </c:pt>
+                <c:pt idx="183">
+                  <c:v>0.3973</c:v>
+                </c:pt>
+                <c:pt idx="184">
                   <c:v>0.346</c:v>
                 </c:pt>
-                <c:pt idx="54">
-                  <c:v>0.0695</c:v>
-                </c:pt>
-                <c:pt idx="55">
-                  <c:v>0.5874</c:v>
-                </c:pt>
-                <c:pt idx="56">
-                  <c:v>0.2402</c:v>
-                </c:pt>
-                <c:pt idx="57">
-                  <c:v>0.326</c:v>
-                </c:pt>
-                <c:pt idx="58">
-                  <c:v>0.0595</c:v>
-                </c:pt>
-                <c:pt idx="59">
-                  <c:v>0.427</c:v>
-                </c:pt>
-                <c:pt idx="60">
-                  <c:v>0.1466</c:v>
-                </c:pt>
-                <c:pt idx="61">
-                  <c:v>0.0399</c:v>
-                </c:pt>
-                <c:pt idx="62">
-                  <c:v>0.3688</c:v>
-                </c:pt>
-                <c:pt idx="63">
-                  <c:v>0.1211</c:v>
-                </c:pt>
-                <c:pt idx="64">
-                  <c:v>0.3446</c:v>
-                </c:pt>
-                <c:pt idx="65">
-                  <c:v>0.4387</c:v>
-                </c:pt>
-                <c:pt idx="66">
-                  <c:v>0.0098</c:v>
-                </c:pt>
-                <c:pt idx="67">
-                  <c:v>0.2372</c:v>
-                </c:pt>
-                <c:pt idx="68">
-                  <c:v>0.2889</c:v>
-                </c:pt>
-                <c:pt idx="69">
-                  <c:v>0.0256</c:v>
-                </c:pt>
-                <c:pt idx="70">
-                  <c:v>0.0854</c:v>
-                </c:pt>
-                <c:pt idx="71">
-                  <c:v>0.3216</c:v>
-                </c:pt>
-                <c:pt idx="72">
-                  <c:v>0.3658</c:v>
-                </c:pt>
-                <c:pt idx="73">
-                  <c:v>0.1044</c:v>
-                </c:pt>
-                <c:pt idx="74">
-                  <c:v>0.0718</c:v>
-                </c:pt>
-                <c:pt idx="75">
-                  <c:v>0.2634</c:v>
-                </c:pt>
-                <c:pt idx="76">
-                  <c:v>0.075</c:v>
-                </c:pt>
-                <c:pt idx="77">
-                  <c:v>0.0126</c:v>
-                </c:pt>
-                <c:pt idx="78">
-                  <c:v>0.4598</c:v>
-                </c:pt>
-                <c:pt idx="79">
-                  <c:v>0.0279</c:v>
-                </c:pt>
-                <c:pt idx="80">
-                  <c:v>0.2605</c:v>
-                </c:pt>
-                <c:pt idx="81">
-                  <c:v>0.1863</c:v>
-                </c:pt>
-                <c:pt idx="82">
-                  <c:v>0.1192</c:v>
-                </c:pt>
-                <c:pt idx="83">
-                  <c:v>0.0292</c:v>
-                </c:pt>
-                <c:pt idx="84">
-                  <c:v>0.015</c:v>
-                </c:pt>
-                <c:pt idx="85">
-                  <c:v>0.3947</c:v>
-                </c:pt>
-                <c:pt idx="86">
-                  <c:v>0.0472</c:v>
-                </c:pt>
-                <c:pt idx="87">
-                  <c:v>0.0562</c:v>
-                </c:pt>
-                <c:pt idx="88">
-                  <c:v>0.4546</c:v>
-                </c:pt>
-                <c:pt idx="89">
-                  <c:v>0.0602</c:v>
-                </c:pt>
-                <c:pt idx="90">
-                  <c:v>0.5444</c:v>
-                </c:pt>
-                <c:pt idx="91">
-                  <c:v>0.0329</c:v>
-                </c:pt>
-                <c:pt idx="92">
-                  <c:v>0.3526</c:v>
-                </c:pt>
-                <c:pt idx="93">
-                  <c:v>0.0306</c:v>
-                </c:pt>
-                <c:pt idx="94">
-                  <c:v>0.0689</c:v>
-                </c:pt>
-                <c:pt idx="95">
-                  <c:v>0.396</c:v>
-                </c:pt>
-                <c:pt idx="96">
-                  <c:v>0.249</c:v>
-                </c:pt>
-                <c:pt idx="97">
-                  <c:v>0.0464</c:v>
-                </c:pt>
-                <c:pt idx="98">
-                  <c:v>0.0283</c:v>
-                </c:pt>
-                <c:pt idx="99">
-                  <c:v>0.0235</c:v>
-                </c:pt>
-                <c:pt idx="100">
-                  <c:v>0.0802</c:v>
-                </c:pt>
-                <c:pt idx="101">
-                  <c:v>0.3519</c:v>
-                </c:pt>
-                <c:pt idx="102">
-                  <c:v>0.3706</c:v>
-                </c:pt>
-                <c:pt idx="103">
-                  <c:v>0.2518</c:v>
-                </c:pt>
-                <c:pt idx="104">
-                  <c:v>0.2154</c:v>
-                </c:pt>
-                <c:pt idx="105">
-                  <c:v>0.0675</c:v>
-                </c:pt>
-                <c:pt idx="106">
-                  <c:v>0.0258</c:v>
-                </c:pt>
-                <c:pt idx="107">
+                <c:pt idx="185">
+                  <c:v>0.544</c:v>
+                </c:pt>
+                <c:pt idx="186">
+                  <c:v>0.2132</c:v>
+                </c:pt>
+                <c:pt idx="187">
+                  <c:v>0.3222</c:v>
+                </c:pt>
+                <c:pt idx="188">
+                  <c:v>0.2647</c:v>
+                </c:pt>
+                <c:pt idx="189">
+                  <c:v>0.3152</c:v>
+                </c:pt>
+                <c:pt idx="190">
+                  <c:v>0.5593</c:v>
+                </c:pt>
+                <c:pt idx="191">
+                  <c:v>0.4625</c:v>
+                </c:pt>
+                <c:pt idx="192">
+                  <c:v>0.2689</c:v>
+                </c:pt>
+                <c:pt idx="193">
+                  <c:v>0.436</c:v>
+                </c:pt>
+                <c:pt idx="194">
+                  <c:v>0.4381</c:v>
+                </c:pt>
+                <c:pt idx="195">
+                  <c:v>0.3136</c:v>
+                </c:pt>
+                <c:pt idx="196">
+                  <c:v>0.4539</c:v>
+                </c:pt>
+                <c:pt idx="197">
+                  <c:v>0.1297</c:v>
+                </c:pt>
+                <c:pt idx="198">
+                  <c:v>0.2149</c:v>
+                </c:pt>
+                <c:pt idx="199">
+                  <c:v>0.2952</c:v>
+                </c:pt>
+                <c:pt idx="200">
+                  <c:v>0.3068</c:v>
+                </c:pt>
+                <c:pt idx="201">
+                  <c:v>0.7029</c:v>
+                </c:pt>
+                <c:pt idx="202">
+                  <c:v>0.4268</c:v>
+                </c:pt>
+                <c:pt idx="203">
+                  <c:v>0.3086</c:v>
+                </c:pt>
+                <c:pt idx="204">
+                  <c:v>0.3093</c:v>
+                </c:pt>
+                <c:pt idx="205">
+                  <c:v>0.3102</c:v>
+                </c:pt>
+                <c:pt idx="206">
+                  <c:v>0.1693</c:v>
+                </c:pt>
+                <c:pt idx="207">
+                  <c:v>0.2212</c:v>
+                </c:pt>
+                <c:pt idx="208">
+                  <c:v>0.269</c:v>
+                </c:pt>
+                <c:pt idx="209">
+                  <c:v>0.6487</c:v>
+                </c:pt>
+                <c:pt idx="210">
+                  <c:v>0.2764</c:v>
+                </c:pt>
+                <c:pt idx="211">
+                  <c:v>0.4501</c:v>
+                </c:pt>
+                <c:pt idx="212">
                   <c:v>0.3718</c:v>
                 </c:pt>
-                <c:pt idx="108">
-                  <c:v>0.2053</c:v>
-                </c:pt>
-                <c:pt idx="109">
-                  <c:v>0.1658</c:v>
-                </c:pt>
-                <c:pt idx="110">
-                  <c:v>0.251</c:v>
-                </c:pt>
-                <c:pt idx="111">
-                  <c:v>0.0759</c:v>
-                </c:pt>
-                <c:pt idx="112">
-                  <c:v>0.0224</c:v>
-                </c:pt>
-                <c:pt idx="113">
-                  <c:v>0.5006</c:v>
-                </c:pt>
-                <c:pt idx="114">
-                  <c:v>0.0494</c:v>
-                </c:pt>
-                <c:pt idx="115">
-                  <c:v>0.7052</c:v>
-                </c:pt>
-                <c:pt idx="116">
-                  <c:v>0.1747</c:v>
-                </c:pt>
-                <c:pt idx="117">
-                  <c:v>0.1128</c:v>
-                </c:pt>
-                <c:pt idx="118">
-                  <c:v>0.2528</c:v>
-                </c:pt>
-                <c:pt idx="119">
-                  <c:v>0.1118</c:v>
-                </c:pt>
-                <c:pt idx="120">
-                  <c:v>0.5103</c:v>
-                </c:pt>
-                <c:pt idx="121">
-                  <c:v>0.0171</c:v>
-                </c:pt>
-                <c:pt idx="122">
-                  <c:v>0.276</c:v>
-                </c:pt>
-                <c:pt idx="123">
-                  <c:v>0.0133</c:v>
-                </c:pt>
-                <c:pt idx="124">
-                  <c:v>0.1295</c:v>
-                </c:pt>
-                <c:pt idx="125">
-                  <c:v>0.2143</c:v>
-                </c:pt>
-                <c:pt idx="126">
-                  <c:v>0.1113</c:v>
-                </c:pt>
-                <c:pt idx="127">
-                  <c:v>0.2332</c:v>
-                </c:pt>
-                <c:pt idx="128">
-                  <c:v>0.1698</c:v>
-                </c:pt>
-                <c:pt idx="129">
-                  <c:v>0.0833</c:v>
-                </c:pt>
-                <c:pt idx="130">
-                  <c:v>0.1892</c:v>
-                </c:pt>
-                <c:pt idx="131">
-                  <c:v>0.1944</c:v>
-                </c:pt>
-                <c:pt idx="132">
-                  <c:v>0.0582</c:v>
-                </c:pt>
-                <c:pt idx="133">
-                  <c:v>0.5244</c:v>
-                </c:pt>
-                <c:pt idx="134">
-                  <c:v>0.1534</c:v>
-                </c:pt>
-                <c:pt idx="135">
-                  <c:v>0.1423</c:v>
-                </c:pt>
-                <c:pt idx="136">
-                  <c:v>0.0839</c:v>
-                </c:pt>
-                <c:pt idx="137">
-                  <c:v>0.3054</c:v>
-                </c:pt>
-                <c:pt idx="138">
-                  <c:v>0.0567</c:v>
-                </c:pt>
-                <c:pt idx="139">
-                  <c:v>0.3114</c:v>
-                </c:pt>
-                <c:pt idx="140">
-                  <c:v>0.0427</c:v>
-                </c:pt>
-                <c:pt idx="141">
-                  <c:v>0.1076</c:v>
-                </c:pt>
-                <c:pt idx="142">
-                  <c:v>0.6522</c:v>
-                </c:pt>
-                <c:pt idx="143">
-                  <c:v>0.3081</c:v>
-                </c:pt>
-                <c:pt idx="144">
-                  <c:v>0.2342</c:v>
-                </c:pt>
-                <c:pt idx="145">
-                  <c:v>0.034</c:v>
-                </c:pt>
-                <c:pt idx="146">
-                  <c:v>0.5659</c:v>
-                </c:pt>
-                <c:pt idx="147">
-                  <c:v>0.4361</c:v>
-                </c:pt>
-                <c:pt idx="148">
-                  <c:v>0.2177</c:v>
-                </c:pt>
-                <c:pt idx="149">
-                  <c:v>0.3446</c:v>
-                </c:pt>
-                <c:pt idx="150">
-                  <c:v>0.1641</c:v>
-                </c:pt>
-                <c:pt idx="151">
-                  <c:v>0.3733</c:v>
-                </c:pt>
-                <c:pt idx="152">
-                  <c:v>0.2048</c:v>
-                </c:pt>
-                <c:pt idx="153">
-                  <c:v>0.8186</c:v>
-                </c:pt>
-                <c:pt idx="154">
-                  <c:v>0.178</c:v>
-                </c:pt>
-                <c:pt idx="155">
-                  <c:v>0.0457</c:v>
-                </c:pt>
-                <c:pt idx="156">
-                  <c:v>0.0706</c:v>
-                </c:pt>
-                <c:pt idx="157">
-                  <c:v>0.0847</c:v>
-                </c:pt>
-                <c:pt idx="158">
-                  <c:v>0.2571</c:v>
-                </c:pt>
-                <c:pt idx="159">
-                  <c:v>0.1253</c:v>
-                </c:pt>
-                <c:pt idx="160">
-                  <c:v>0.339</c:v>
-                </c:pt>
-                <c:pt idx="161">
-                  <c:v>0.0144</c:v>
-                </c:pt>
-                <c:pt idx="162">
-                  <c:v>0.3356</c:v>
-                </c:pt>
-                <c:pt idx="163">
-                  <c:v>0.0291</c:v>
-                </c:pt>
-                <c:pt idx="164">
-                  <c:v>0.0259</c:v>
-                </c:pt>
-                <c:pt idx="165">
-                  <c:v>0.4956</c:v>
-                </c:pt>
-                <c:pt idx="166">
-                  <c:v>0.3344</c:v>
-                </c:pt>
-                <c:pt idx="167">
-                  <c:v>0.27</c:v>
-                </c:pt>
-                <c:pt idx="168">
-                  <c:v>0.3025</c:v>
-                </c:pt>
-                <c:pt idx="169">
-                  <c:v>0.3176</c:v>
-                </c:pt>
-                <c:pt idx="170">
-                  <c:v>0.2552</c:v>
-                </c:pt>
-                <c:pt idx="171">
-                  <c:v>0.4116</c:v>
-                </c:pt>
-                <c:pt idx="172">
-                  <c:v>0.2649</c:v>
-                </c:pt>
-                <c:pt idx="173">
-                  <c:v>0.3772</c:v>
-                </c:pt>
-                <c:pt idx="174">
-                  <c:v>0.316</c:v>
-                </c:pt>
-                <c:pt idx="175">
-                  <c:v>0.2355</c:v>
-                </c:pt>
-                <c:pt idx="176">
-                  <c:v>0.073</c:v>
-                </c:pt>
-                <c:pt idx="177">
-                  <c:v>0.2977</c:v>
-                </c:pt>
-                <c:pt idx="178">
-                  <c:v>0.1451</c:v>
-                </c:pt>
-                <c:pt idx="179">
-                  <c:v>0.0686</c:v>
-                </c:pt>
-                <c:pt idx="180">
-                  <c:v>0.2986</c:v>
-                </c:pt>
-                <c:pt idx="181">
-                  <c:v>0.1648</c:v>
-                </c:pt>
-                <c:pt idx="182">
-                  <c:v>0.6198</c:v>
-                </c:pt>
-                <c:pt idx="183">
-                  <c:v>1.0</c:v>
-                </c:pt>
-                <c:pt idx="184">
-                  <c:v>0.0693</c:v>
-                </c:pt>
-                <c:pt idx="185">
-                  <c:v>0.4525</c:v>
-                </c:pt>
-                <c:pt idx="186">
-                  <c:v>0.0312</c:v>
-                </c:pt>
-                <c:pt idx="187">
-                  <c:v>0.2172</c:v>
-                </c:pt>
-                <c:pt idx="188">
-                  <c:v>0.2808</c:v>
-                </c:pt>
-                <c:pt idx="189">
-                  <c:v>0.2639</c:v>
-                </c:pt>
-                <c:pt idx="190">
-                  <c:v>0.2918</c:v>
-                </c:pt>
-                <c:pt idx="191">
-                  <c:v>0.3764</c:v>
-                </c:pt>
-                <c:pt idx="192">
-                  <c:v>0.1096</c:v>
-                </c:pt>
-                <c:pt idx="193">
-                  <c:v>0.0573</c:v>
-                </c:pt>
-                <c:pt idx="194">
-                  <c:v>0.0548</c:v>
-                </c:pt>
-                <c:pt idx="195">
-                  <c:v>0.7126</c:v>
-                </c:pt>
-                <c:pt idx="196">
-                  <c:v>0.3812</c:v>
-                </c:pt>
-                <c:pt idx="197">
-                  <c:v>0.1887</c:v>
-                </c:pt>
-                <c:pt idx="198">
-                  <c:v>0.1641</c:v>
-                </c:pt>
-                <c:pt idx="199">
-                  <c:v>0.0251</c:v>
-                </c:pt>
-                <c:pt idx="200">
-                  <c:v>0.0258</c:v>
-                </c:pt>
-                <c:pt idx="201">
-                  <c:v>0.5094</c:v>
-                </c:pt>
-                <c:pt idx="202">
-                  <c:v>0.2195</c:v>
-                </c:pt>
-                <c:pt idx="203">
-                  <c:v>0.1218</c:v>
-                </c:pt>
-                <c:pt idx="204">
-                  <c:v>0.1036</c:v>
-                </c:pt>
-                <c:pt idx="205">
-                  <c:v>0.0609</c:v>
-                </c:pt>
-                <c:pt idx="206">
-                  <c:v>0.1901</c:v>
-                </c:pt>
-                <c:pt idx="207">
-                  <c:v>0.1768</c:v>
-                </c:pt>
-                <c:pt idx="208">
-                  <c:v>0.1397</c:v>
-                </c:pt>
-                <c:pt idx="209">
-                  <c:v>0.244</c:v>
-                </c:pt>
-                <c:pt idx="210">
-                  <c:v>0.1172</c:v>
-                </c:pt>
-                <c:pt idx="211">
-                  <c:v>0.0987</c:v>
-                </c:pt>
-                <c:pt idx="212">
-                  <c:v>0.1804</c:v>
-                </c:pt>
                 <c:pt idx="213">
-                  <c:v>0.0349</c:v>
+                  <c:v>0.2452</c:v>
                 </c:pt>
                 <c:pt idx="214">
-                  <c:v>0.0817</c:v>
+                  <c:v>0.5625</c:v>
                 </c:pt>
                 <c:pt idx="215">
-                  <c:v>0.1501</c:v>
+                  <c:v>0.2667</c:v>
                 </c:pt>
                 <c:pt idx="216">
-                  <c:v>0.0387</c:v>
+                  <c:v>0.3321</c:v>
                 </c:pt>
                 <c:pt idx="217">
-                  <c:v>0.2977</c:v>
+                  <c:v>0.4067</c:v>
                 </c:pt>
                 <c:pt idx="218">
-                  <c:v>0.159</c:v>
+                  <c:v>0.4577</c:v>
                 </c:pt>
                 <c:pt idx="219">
-                  <c:v>0.2269</c:v>
+                  <c:v>0.1235</c:v>
                 </c:pt>
                 <c:pt idx="220">
-                  <c:v>0.2519</c:v>
+                  <c:v>0.1082</c:v>
                 </c:pt>
                 <c:pt idx="221">
-                  <c:v>0.052</c:v>
+                  <c:v>0.2202</c:v>
                 </c:pt>
                 <c:pt idx="222">
-                  <c:v>0.2738</c:v>
+                  <c:v>0.4672</c:v>
                 </c:pt>
                 <c:pt idx="223">
-                  <c:v>0.1666</c:v>
+                  <c:v>0.1725</c:v>
                 </c:pt>
                 <c:pt idx="224">
-                  <c:v>0.0672</c:v>
+                  <c:v>0.2302</c:v>
                 </c:pt>
                 <c:pt idx="225">
-                  <c:v>0.3249</c:v>
+                  <c:v>0.0029</c:v>
                 </c:pt>
                 <c:pt idx="226">
-                  <c:v>0.0788</c:v>
+                  <c:v>0.2523</c:v>
                 </c:pt>
                 <c:pt idx="227">
-                  <c:v>0.0885</c:v>
+                  <c:v>0.2334</c:v>
                 </c:pt>
                 <c:pt idx="228">
-                  <c:v>0.3103</c:v>
+                  <c:v>0.6939</c:v>
                 </c:pt>
                 <c:pt idx="229">
-                  <c:v>0.0139</c:v>
+                  <c:v>0.3622</c:v>
                 </c:pt>
                 <c:pt idx="230">
-                  <c:v>0.3138</c:v>
+                  <c:v>0.9003</c:v>
                 </c:pt>
                 <c:pt idx="231">
-                  <c:v>0.392</c:v>
+                  <c:v>0.4094</c:v>
                 </c:pt>
                 <c:pt idx="232">
-                  <c:v>0.1662</c:v>
+                  <c:v>0.4283</c:v>
                 </c:pt>
                 <c:pt idx="233">
-                  <c:v>0.0144</c:v>
+                  <c:v>0.2616</c:v>
                 </c:pt>
                 <c:pt idx="234">
-                  <c:v>0.2769</c:v>
+                  <c:v>0.5773</c:v>
                 </c:pt>
                 <c:pt idx="235">
-                  <c:v>0.0717</c:v>
+                  <c:v>0.2768</c:v>
                 </c:pt>
                 <c:pt idx="236">
-                  <c:v>0.3855</c:v>
+                  <c:v>0.1479</c:v>
                 </c:pt>
                 <c:pt idx="237">
-                  <c:v>0.0095</c:v>
+                  <c:v>0.2724</c:v>
                 </c:pt>
                 <c:pt idx="238">
-                  <c:v>0.2882</c:v>
+                  <c:v>0.165</c:v>
                 </c:pt>
                 <c:pt idx="239">
-                  <c:v>0.0176</c:v>
+                  <c:v>0.3611</c:v>
                 </c:pt>
                 <c:pt idx="240">
-                  <c:v>0.5519</c:v>
+                  <c:v>0.1865</c:v>
                 </c:pt>
                 <c:pt idx="241">
-                  <c:v>0.0488</c:v>
+                  <c:v>0.273</c:v>
                 </c:pt>
                 <c:pt idx="242">
-                  <c:v>0.49</c:v>
+                  <c:v>0.699</c:v>
                 </c:pt>
                 <c:pt idx="243">
-                  <c:v>0.1424</c:v>
+                  <c:v>0.2244</c:v>
                 </c:pt>
                 <c:pt idx="244">
-                  <c:v>0.0749</c:v>
+                  <c:v>0.1927</c:v>
                 </c:pt>
                 <c:pt idx="245">
-                  <c:v>0.17</c:v>
+                  <c:v>0.3525</c:v>
                 </c:pt>
                 <c:pt idx="246">
-                  <c:v>0.0466</c:v>
+                  <c:v>0.4339</c:v>
                 </c:pt>
                 <c:pt idx="247">
-                  <c:v>0.2038</c:v>
+                  <c:v>0.5665</c:v>
                 </c:pt>
                 <c:pt idx="248">
-                  <c:v>0.0235</c:v>
+                  <c:v>0.3956</c:v>
                 </c:pt>
                 <c:pt idx="249">
-                  <c:v>0.165</c:v>
+                  <c:v>0.5181</c:v>
                 </c:pt>
               </c:numCache>
             </c:numRef>
@@ -6441,7 +6441,7 @@
                 <a:solidFill>
                   <a:srgbClr val="EAF0F7"/>
                 </a:solidFill>
-                <a:latin typeface="Georgia"/>
+                <a:latin typeface="Segoe UI Semibold"/>
               </a:rPr>
               <a:t>Can patient history help a</a:t>
             </a:r>
@@ -6457,7 +6457,7 @@
                 <a:solidFill>
                   <a:srgbClr val="EAF0F7"/>
                 </a:solidFill>
-                <a:latin typeface="Georgia"/>
+                <a:latin typeface="Segoe UI Semibold"/>
               </a:rPr>
               <a:t>model catch skin cancer?</a:t>
             </a:r>
@@ -6691,7 +6691,7 @@
                 <a:solidFill>
                   <a:srgbClr val="EAF0F7"/>
                 </a:solidFill>
-                <a:latin typeface="Georgia"/>
+                <a:latin typeface="Segoe UI Semibold"/>
               </a:rPr>
               <a:t>Recall depends on where the lesion is</a:t>
             </a:r>
@@ -6794,7 +6794,7 @@
         <p:spPr>
           <a:xfrm>
             <a:off x="2651760" y="1938528"/>
-            <a:ext cx="5980002" cy="274320"/>
+            <a:ext cx="6321494" cy="274320"/>
           </a:xfrm>
           <a:prstGeom prst="roundRect">
             <a:avLst>
@@ -6865,7 +6865,7 @@
                 </a:solidFill>
                 <a:latin typeface="Consolas"/>
               </a:rPr>
-              <a:t>92.1%</a:t>
+              <a:t>97.4%</a:t>
             </a:r>
           </a:p>
         </p:txBody>
@@ -6966,7 +6966,7 @@
         <p:spPr>
           <a:xfrm>
             <a:off x="2651760" y="2441448"/>
-            <a:ext cx="5700186" cy="274320"/>
+            <a:ext cx="6017008" cy="274320"/>
           </a:xfrm>
           <a:prstGeom prst="roundRect">
             <a:avLst>
@@ -7037,7 +7037,7 @@
                 </a:solidFill>
                 <a:latin typeface="Consolas"/>
               </a:rPr>
-              <a:t>87.8%</a:t>
+              <a:t>92.7%</a:t>
             </a:r>
           </a:p>
         </p:txBody>
@@ -7138,7 +7138,7 @@
         <p:spPr>
           <a:xfrm>
             <a:off x="2651760" y="2944368"/>
-            <a:ext cx="5232745" cy="274320"/>
+            <a:ext cx="5620332" cy="274320"/>
           </a:xfrm>
           <a:prstGeom prst="roundRect">
             <a:avLst>
@@ -7209,7 +7209,7 @@
                 </a:solidFill>
                 <a:latin typeface="Consolas"/>
               </a:rPr>
-              <a:t>80.6%</a:t>
+              <a:t>86.6%</a:t>
             </a:r>
           </a:p>
         </p:txBody>
@@ -7310,7 +7310,7 @@
         <p:spPr>
           <a:xfrm>
             <a:off x="2651760" y="3447288"/>
-            <a:ext cx="4328376" cy="274320"/>
+            <a:ext cx="3246120" cy="274320"/>
           </a:xfrm>
           <a:prstGeom prst="roundRect">
             <a:avLst>
@@ -7381,7 +7381,7 @@
                 </a:solidFill>
                 <a:latin typeface="Consolas"/>
               </a:rPr>
-              <a:t>66.7%</a:t>
+              <a:t>50.0%</a:t>
             </a:r>
           </a:p>
         </p:txBody>
@@ -7482,7 +7482,7 @@
         <p:spPr>
           <a:xfrm>
             <a:off x="2651760" y="3950208"/>
-            <a:ext cx="1298448" cy="274320"/>
+            <a:ext cx="3895344" cy="274320"/>
           </a:xfrm>
           <a:prstGeom prst="roundRect">
             <a:avLst>
@@ -7553,7 +7553,7 @@
                 </a:solidFill>
                 <a:latin typeface="Consolas"/>
               </a:rPr>
-              <a:t>20.0%</a:t>
+              <a:t>60.0%</a:t>
             </a:r>
           </a:p>
         </p:txBody>
@@ -7730,7 +7730,7 @@
                 <a:solidFill>
                   <a:srgbClr val="EAF0F7"/>
                 </a:solidFill>
-                <a:latin typeface="Georgia"/>
+                <a:latin typeface="Segoe UI Semibold"/>
               </a:rPr>
               <a:t>A recall gap by sex, observed but not explained</a:t>
             </a:r>
@@ -7771,7 +7771,7 @@
                 </a:solidFill>
                 <a:latin typeface="Segoe UI"/>
               </a:rPr>
-              <a:t>Malignant recall is 85.2% for male patients versus 71.6% for female patients in this sample — a 14-point gap.</a:t>
+              <a:t>Malignant recall is 87.1% for male patients versus 83.2% for female patients in this sample — a 4-point gap.</a:t>
             </a:r>
           </a:p>
         </p:txBody>
@@ -7872,7 +7872,7 @@
         <p:spPr>
           <a:xfrm>
             <a:off x="2651760" y="2761488"/>
-            <a:ext cx="5139440" cy="274320"/>
+            <a:ext cx="5256519" cy="274320"/>
           </a:xfrm>
           <a:prstGeom prst="roundRect">
             <a:avLst>
@@ -7943,7 +7943,7 @@
                 </a:solidFill>
                 <a:latin typeface="Consolas"/>
               </a:rPr>
-              <a:t>85.2%</a:t>
+              <a:t>87.1%</a:t>
             </a:r>
           </a:p>
         </p:txBody>
@@ -8044,7 +8044,7 @@
         <p:spPr>
           <a:xfrm>
             <a:off x="2651760" y="3264408"/>
-            <a:ext cx="4319881" cy="274320"/>
+            <a:ext cx="5018739" cy="274320"/>
           </a:xfrm>
           <a:prstGeom prst="roundRect">
             <a:avLst>
@@ -8115,7 +8115,7 @@
                 </a:solidFill>
                 <a:latin typeface="Consolas"/>
               </a:rPr>
-              <a:t>71.6%</a:t>
+              <a:t>83.2%</a:t>
             </a:r>
           </a:p>
         </p:txBody>
@@ -8340,7 +8340,7 @@
                 <a:solidFill>
                   <a:srgbClr val="EAF0F7"/>
                 </a:solidFill>
-                <a:latin typeface="Georgia"/>
+                <a:latin typeface="Segoe UI Semibold"/>
               </a:rPr>
               <a:t>Confidence isn't proof</a:t>
             </a:r>
@@ -8381,7 +8381,7 @@
                 </a:solidFill>
                 <a:latin typeface="Segoe UI"/>
               </a:rPr>
-              <a:t>On average the model is more confident when it's right than when it's wrong — a sign of reasonable calibration. But of its 97 errors on this sample, 42 (43%) were confidently wrong, not borderline calls like the case shown earlier.</a:t>
+              <a:t>On average the model is more confident when it's right than when it's wrong — a sign of reasonable calibration. But of its 87 errors on this sample, 37 (42%) were confidently wrong, not borderline calls like the case shown earlier.</a:t>
             </a:r>
           </a:p>
         </p:txBody>
@@ -8468,7 +8468,7 @@
                 </a:solidFill>
                 <a:latin typeface="Consolas"/>
               </a:rPr>
-              <a:t>0.41</a:t>
+              <a:t>0.40</a:t>
             </a:r>
           </a:p>
         </p:txBody>
@@ -8594,7 +8594,7 @@
                 </a:solidFill>
                 <a:latin typeface="Consolas"/>
               </a:rPr>
-              <a:t>0.26</a:t>
+              <a:t>0.30</a:t>
             </a:r>
           </a:p>
         </p:txBody>
@@ -8720,7 +8720,7 @@
                 </a:solidFill>
                 <a:latin typeface="Consolas"/>
               </a:rPr>
-              <a:t>43%</a:t>
+              <a:t>42%</a:t>
             </a:r>
           </a:p>
         </p:txBody>
@@ -8897,7 +8897,7 @@
                 <a:solidFill>
                   <a:srgbClr val="EAF0F7"/>
                 </a:solidFill>
-                <a:latin typeface="Georgia"/>
+                <a:latin typeface="Segoe UI Semibold"/>
               </a:rPr>
               <a:t>What this isn't, yet</a:t>
             </a:r>
@@ -9349,7 +9349,7 @@
                 <a:solidFill>
                   <a:srgbClr val="EAF0F7"/>
                 </a:solidFill>
-                <a:latin typeface="Georgia"/>
+                <a:latin typeface="Segoe UI Semibold"/>
               </a:rPr>
               <a:t>Every number here is clickable</a:t>
             </a:r>
@@ -9645,7 +9645,7 @@
                 <a:solidFill>
                   <a:srgbClr val="EAF0F7"/>
                 </a:solidFill>
-                <a:latin typeface="Georgia"/>
+                <a:latin typeface="Segoe UI Semibold"/>
               </a:rPr>
               <a:t>A dermoscopy photo isn't the whole story</a:t>
             </a:r>
@@ -9824,7 +9824,7 @@
                 <a:solidFill>
                   <a:srgbClr val="EAF0F7"/>
                 </a:solidFill>
-                <a:latin typeface="Georgia"/>
+                <a:latin typeface="Segoe UI Semibold"/>
               </a:rPr>
               <a:t>HAM10000, split by lesion — not by image</a:t>
             </a:r>
@@ -10381,7 +10381,7 @@
                 <a:solidFill>
                   <a:srgbClr val="EAF0F7"/>
                 </a:solidFill>
-                <a:latin typeface="Georgia"/>
+                <a:latin typeface="Segoe UI Semibold"/>
               </a:rPr>
               <a:t>Two encoders, fused, one classifier</a:t>
             </a:r>
@@ -10468,7 +10468,7 @@
                 <a:solidFill>
                   <a:srgbClr val="6D7D92"/>
                 </a:solidFill>
-                <a:latin typeface="Georgia"/>
+                <a:latin typeface="Segoe UI Semibold"/>
               </a:rPr>
               <a:t>1</a:t>
             </a:r>
@@ -10633,7 +10633,7 @@
                 <a:solidFill>
                   <a:srgbClr val="6D7D92"/>
                 </a:solidFill>
-                <a:latin typeface="Georgia"/>
+                <a:latin typeface="Segoe UI Semibold"/>
               </a:rPr>
               <a:t>2</a:t>
             </a:r>
@@ -10798,7 +10798,7 @@
                 <a:solidFill>
                   <a:srgbClr val="6D7D92"/>
                 </a:solidFill>
-                <a:latin typeface="Georgia"/>
+                <a:latin typeface="Segoe UI Semibold"/>
               </a:rPr>
               <a:t>3</a:t>
             </a:r>
@@ -10963,7 +10963,7 @@
                 <a:solidFill>
                   <a:srgbClr val="6D7D92"/>
                 </a:solidFill>
-                <a:latin typeface="Georgia"/>
+                <a:latin typeface="Segoe UI Semibold"/>
               </a:rPr>
               <a:t>4</a:t>
             </a:r>
@@ -11181,7 +11181,7 @@
                 <a:solidFill>
                   <a:srgbClr val="EAF0F7"/>
                 </a:solidFill>
-                <a:latin typeface="Georgia"/>
+                <a:latin typeface="Segoe UI Semibold"/>
               </a:rPr>
               <a:t>On 500 held-out test lesions</a:t>
             </a:r>
@@ -11270,7 +11270,7 @@
                 </a:solidFill>
                 <a:latin typeface="Consolas"/>
               </a:rPr>
-              <a:t>0.899</a:t>
+              <a:t>0.903</a:t>
             </a:r>
           </a:p>
         </p:txBody>
@@ -11396,7 +11396,7 @@
                 </a:solidFill>
                 <a:latin typeface="Consolas"/>
               </a:rPr>
-              <a:t>80.6%</a:t>
+              <a:t>82.6%</a:t>
             </a:r>
           </a:p>
         </p:txBody>
@@ -11522,7 +11522,7 @@
                 </a:solidFill>
                 <a:latin typeface="Consolas"/>
               </a:rPr>
-              <a:t>80.0%</a:t>
+              <a:t>85.6%</a:t>
             </a:r>
           </a:p>
         </p:txBody>
@@ -11648,7 +11648,7 @@
                 </a:solidFill>
                 <a:latin typeface="Consolas"/>
               </a:rPr>
-              <a:t>81.0%</a:t>
+              <a:t>80.8%</a:t>
             </a:r>
           </a:p>
         </p:txBody>
@@ -11912,7 +11912,7 @@
                 <a:solidFill>
                   <a:srgbClr val="EAF0F7"/>
                 </a:solidFill>
-                <a:latin typeface="Georgia"/>
+                <a:latin typeface="Segoe UI Semibold"/>
               </a:rPr>
               <a:t>What the fused features actually look like</a:t>
             </a:r>
@@ -12148,7 +12148,7 @@
                 <a:solidFill>
                   <a:srgbClr val="EAF0F7"/>
                 </a:solidFill>
-                <a:latin typeface="Georgia"/>
+                <a:latin typeface="Segoe UI Semibold"/>
               </a:rPr>
               <a:t>Confidently, correctly malignant</a:t>
             </a:r>
@@ -12549,7 +12549,7 @@
                 <a:solidFill>
                   <a:srgbClr val="EAF0F7"/>
                 </a:solidFill>
-                <a:latin typeface="Georgia"/>
+                <a:latin typeface="Segoe UI Semibold"/>
               </a:rPr>
               <a:t>Confidently, incorrectly benign</a:t>
             </a:r>
@@ -12950,7 +12950,7 @@
                 <a:solidFill>
                   <a:srgbClr val="EAF0F7"/>
                 </a:solidFill>
-                <a:latin typeface="Georgia"/>
+                <a:latin typeface="Segoe UI Semibold"/>
               </a:rPr>
               <a:t>Age carries real signal — and a real weakness</a:t>
             </a:r>
@@ -13264,7 +13264,7 @@
         <p:spPr>
           <a:xfrm>
             <a:off x="2651760" y="3264408"/>
-            <a:ext cx="5290919" cy="274320"/>
+            <a:ext cx="5704319" cy="274320"/>
           </a:xfrm>
           <a:prstGeom prst="roundRect">
             <a:avLst>
@@ -13335,7 +13335,7 @@
                 </a:solidFill>
                 <a:latin typeface="Consolas"/>
               </a:rPr>
-              <a:t>87.7%</a:t>
+              <a:t>94.5%</a:t>
             </a:r>
           </a:p>
         </p:txBody>
